--- a/research methods/term project - review article/slides/Explainable Identification of Human vs. LLM-Generated Text-2.pptx
+++ b/research methods/term project - review article/slides/Explainable Identification of Human vs. LLM-Generated Text-2.pptx
@@ -4,6 +4,9 @@
   <p:sldMasterIdLst>
     <p:sldMasterId id="2147483648" r:id="rId1"/>
   </p:sldMasterIdLst>
+  <p:notesMasterIdLst>
+    <p:notesMasterId r:id="rId17"/>
+  </p:notesMasterIdLst>
   <p:sldIdLst>
     <p:sldId id="256" r:id="rId2"/>
     <p:sldId id="257" r:id="rId3"/>
@@ -21,21 +24,120 @@
     <p:sldId id="269" r:id="rId15"/>
     <p:sldId id="270" r:id="rId16"/>
   </p:sldIdLst>
-  <p:notesMasterIdLst>
-    <p:notesMasterId r:id="rId17"/>
-  </p:notesMasterIdLst>
   <p:sldSz cx="16256000" cy="9144000"/>
   <p:notesSz cx="9144000" cy="16256000"/>
   <p:embeddedFontLst>
     <p:embeddedFont>
-      <p:font typeface="Liter" charset="-122" pitchFamily="34"/>
-      <p:regular r:id="rId22"/>
+      <p:font typeface="Liter" panose="020B0604020202020204" charset="0"/>
+      <p:regular r:id="rId18"/>
     </p:embeddedFont>
     <p:embeddedFont>
-      <p:font typeface="Quattrocento Sans" charset="-122" pitchFamily="34"/>
-      <p:regular r:id="rId23"/>
+      <p:font typeface="Quattrocento Sans" panose="020B0502050000020003" pitchFamily="34" charset="0"/>
+      <p:regular r:id="rId19"/>
+      <p:bold r:id="rId20"/>
+      <p:italic r:id="rId21"/>
     </p:embeddedFont>
   </p:embeddedFontLst>
+  <p:defaultTextStyle>
+    <a:defPPr>
+      <a:defRPr lang="en-US"/>
+    </a:defPPr>
+    <a:lvl1pPr marL="0" algn="l" defTabSz="914400" rtl="0" eaLnBrk="1" latinLnBrk="0" hangingPunct="1">
+      <a:defRPr sz="1800" kern="1200">
+        <a:solidFill>
+          <a:schemeClr val="tx1"/>
+        </a:solidFill>
+        <a:latin typeface="+mn-lt"/>
+        <a:ea typeface="+mn-ea"/>
+        <a:cs typeface="+mn-cs"/>
+      </a:defRPr>
+    </a:lvl1pPr>
+    <a:lvl2pPr marL="457200" algn="l" defTabSz="914400" rtl="0" eaLnBrk="1" latinLnBrk="0" hangingPunct="1">
+      <a:defRPr sz="1800" kern="1200">
+        <a:solidFill>
+          <a:schemeClr val="tx1"/>
+        </a:solidFill>
+        <a:latin typeface="+mn-lt"/>
+        <a:ea typeface="+mn-ea"/>
+        <a:cs typeface="+mn-cs"/>
+      </a:defRPr>
+    </a:lvl2pPr>
+    <a:lvl3pPr marL="914400" algn="l" defTabSz="914400" rtl="0" eaLnBrk="1" latinLnBrk="0" hangingPunct="1">
+      <a:defRPr sz="1800" kern="1200">
+        <a:solidFill>
+          <a:schemeClr val="tx1"/>
+        </a:solidFill>
+        <a:latin typeface="+mn-lt"/>
+        <a:ea typeface="+mn-ea"/>
+        <a:cs typeface="+mn-cs"/>
+      </a:defRPr>
+    </a:lvl3pPr>
+    <a:lvl4pPr marL="1371600" algn="l" defTabSz="914400" rtl="0" eaLnBrk="1" latinLnBrk="0" hangingPunct="1">
+      <a:defRPr sz="1800" kern="1200">
+        <a:solidFill>
+          <a:schemeClr val="tx1"/>
+        </a:solidFill>
+        <a:latin typeface="+mn-lt"/>
+        <a:ea typeface="+mn-ea"/>
+        <a:cs typeface="+mn-cs"/>
+      </a:defRPr>
+    </a:lvl4pPr>
+    <a:lvl5pPr marL="1828800" algn="l" defTabSz="914400" rtl="0" eaLnBrk="1" latinLnBrk="0" hangingPunct="1">
+      <a:defRPr sz="1800" kern="1200">
+        <a:solidFill>
+          <a:schemeClr val="tx1"/>
+        </a:solidFill>
+        <a:latin typeface="+mn-lt"/>
+        <a:ea typeface="+mn-ea"/>
+        <a:cs typeface="+mn-cs"/>
+      </a:defRPr>
+    </a:lvl5pPr>
+    <a:lvl6pPr marL="2286000" algn="l" defTabSz="914400" rtl="0" eaLnBrk="1" latinLnBrk="0" hangingPunct="1">
+      <a:defRPr sz="1800" kern="1200">
+        <a:solidFill>
+          <a:schemeClr val="tx1"/>
+        </a:solidFill>
+        <a:latin typeface="+mn-lt"/>
+        <a:ea typeface="+mn-ea"/>
+        <a:cs typeface="+mn-cs"/>
+      </a:defRPr>
+    </a:lvl6pPr>
+    <a:lvl7pPr marL="2743200" algn="l" defTabSz="914400" rtl="0" eaLnBrk="1" latinLnBrk="0" hangingPunct="1">
+      <a:defRPr sz="1800" kern="1200">
+        <a:solidFill>
+          <a:schemeClr val="tx1"/>
+        </a:solidFill>
+        <a:latin typeface="+mn-lt"/>
+        <a:ea typeface="+mn-ea"/>
+        <a:cs typeface="+mn-cs"/>
+      </a:defRPr>
+    </a:lvl7pPr>
+    <a:lvl8pPr marL="3200400" algn="l" defTabSz="914400" rtl="0" eaLnBrk="1" latinLnBrk="0" hangingPunct="1">
+      <a:defRPr sz="1800" kern="1200">
+        <a:solidFill>
+          <a:schemeClr val="tx1"/>
+        </a:solidFill>
+        <a:latin typeface="+mn-lt"/>
+        <a:ea typeface="+mn-ea"/>
+        <a:cs typeface="+mn-cs"/>
+      </a:defRPr>
+    </a:lvl8pPr>
+    <a:lvl9pPr marL="3657600" algn="l" defTabSz="914400" rtl="0" eaLnBrk="1" latinLnBrk="0" hangingPunct="1">
+      <a:defRPr sz="1800" kern="1200">
+        <a:solidFill>
+          <a:schemeClr val="tx1"/>
+        </a:solidFill>
+        <a:latin typeface="+mn-lt"/>
+        <a:ea typeface="+mn-ea"/>
+        <a:cs typeface="+mn-cs"/>
+      </a:defRPr>
+    </a:lvl9pPr>
+  </p:defaultTextStyle>
+  <p:extLst>
+    <p:ext uri="{EFAFB233-063F-42B5-8137-9DF3F51BA10A}">
+      <p15:sldGuideLst xmlns:p15="http://schemas.microsoft.com/office/powerpoint/2012/main"/>
+    </p:ext>
+  </p:extLst>
 </p:presentation>
 </file>
 
@@ -61,234 +163,10 @@
           <a:chExt cx="0" cy="0"/>
         </a:xfrm>
       </p:grpSpPr>
-      <p:sp>
-        <p:nvSpPr>
-          <p:cNvPr id="2" name="Header Placeholder 1"/>
-          <p:cNvSpPr>
-            <a:spLocks noGrp="1"/>
-          </p:cNvSpPr>
-          <p:nvPr>
-            <p:ph type="hdr" sz="quarter"/>
-          </p:nvPr>
-        </p:nvSpPr>
-        <p:spPr>
-          <a:xfrm>
-            <a:off x="0" y="0"/>
-            <a:ext cx="2971800" cy="458788"/>
-          </a:xfrm>
-          <a:prstGeom prst="rect">
-            <a:avLst/>
-          </a:prstGeom>
-        </p:spPr>
-        <p:txBody>
-          <a:bodyPr vert="horz" lIns="91440" tIns="45720" rIns="91440" bIns="45720" rtlCol="0"/>
-          <a:lstStyle>
-            <a:lvl1pPr algn="l">
-              <a:defRPr sz="1200"/>
-            </a:lvl1pPr>
-          </a:lstStyle>
-          <a:p>
-            <a:endParaRPr lang="en-US"/>
-          </a:p>
-        </p:txBody>
-      </p:sp>
-      <p:sp>
-        <p:nvSpPr>
-          <p:cNvPr id="3" name="Date Placeholder 2"/>
-          <p:cNvSpPr>
-            <a:spLocks noGrp="1"/>
-          </p:cNvSpPr>
-          <p:nvPr>
-            <p:ph type="dt" idx="1"/>
-          </p:nvPr>
-        </p:nvSpPr>
-        <p:spPr>
-          <a:xfrm>
-            <a:off x="3884613" y="0"/>
-            <a:ext cx="2971800" cy="458788"/>
-          </a:xfrm>
-          <a:prstGeom prst="rect">
-            <a:avLst/>
-          </a:prstGeom>
-        </p:spPr>
-        <p:txBody>
-          <a:bodyPr vert="horz" lIns="91440" tIns="45720" rIns="91440" bIns="45720" rtlCol="0"/>
-          <a:lstStyle>
-            <a:lvl1pPr algn="r">
-              <a:defRPr sz="1200"/>
-            </a:lvl1pPr>
-          </a:lstStyle>
-          <a:p>
-            <a:fld id="{5282F153-3F37-0F45-9E97-73ACFA13230C}" type="datetimeFigureOut">
-              <a:rPr lang="en-US"/>
-              <a:t>7/23/19</a:t>
-            </a:fld>
-            <a:endParaRPr lang="en-US"/>
-          </a:p>
-        </p:txBody>
-      </p:sp>
-      <p:sp>
-        <p:nvSpPr>
-          <p:cNvPr id="4" name="Slide Image Placeholder 3"/>
-          <p:cNvSpPr>
-            <a:spLocks noGrp="1" noRot="1" noChangeAspect="1"/>
-          </p:cNvSpPr>
-          <p:nvPr>
-            <p:ph type="sldImg" idx="2"/>
-          </p:nvPr>
-        </p:nvSpPr>
-        <p:spPr>
-          <a:xfrm>
-            <a:off x="685800" y="1143000"/>
-            <a:ext cx="5486400" cy="3086100"/>
-          </a:xfrm>
-          <a:prstGeom prst="rect">
-            <a:avLst/>
-          </a:prstGeom>
-          <a:noFill/>
-          <a:ln w="12700">
-            <a:solidFill>
-              <a:prstClr val="black"/>
-            </a:solidFill>
-          </a:ln>
-        </p:spPr>
-        <p:txBody>
-          <a:bodyPr vert="horz" lIns="91440" tIns="45720" rIns="91440" bIns="45720" rtlCol="0" anchor="ctr"/>
-          <a:lstStyle/>
-          <a:p>
-            <a:endParaRPr lang="en-US"/>
-          </a:p>
-        </p:txBody>
-      </p:sp>
-      <p:sp>
-        <p:nvSpPr>
-          <p:cNvPr id="5" name="Notes Placeholder 4"/>
-          <p:cNvSpPr>
-            <a:spLocks noGrp="1"/>
-          </p:cNvSpPr>
-          <p:nvPr>
-            <p:ph type="body" sz="quarter" idx="3"/>
-          </p:nvPr>
-        </p:nvSpPr>
-        <p:spPr>
-          <a:xfrm>
-            <a:off x="685800" y="4400550"/>
-            <a:ext cx="5486400" cy="3600450"/>
-          </a:xfrm>
-          <a:prstGeom prst="rect">
-            <a:avLst/>
-          </a:prstGeom>
-        </p:spPr>
-        <p:txBody>
-          <a:bodyPr vert="horz" lIns="91440" tIns="45720" rIns="91440" bIns="45720" rtlCol="0"/>
-          <a:lstStyle/>
-          <a:p>
-            <a:pPr lvl="0"/>
-            <a:r>
-              <a:rPr lang="en-US"/>
-              <a:t>Click to edit Master text styles</a:t>
-            </a:r>
-          </a:p>
-          <a:p>
-            <a:pPr lvl="1"/>
-            <a:r>
-              <a:rPr lang="en-US"/>
-              <a:t>Second level</a:t>
-            </a:r>
-          </a:p>
-          <a:p>
-            <a:pPr lvl="2"/>
-            <a:r>
-              <a:rPr lang="en-US"/>
-              <a:t>Third level</a:t>
-            </a:r>
-          </a:p>
-          <a:p>
-            <a:pPr lvl="3"/>
-            <a:r>
-              <a:rPr lang="en-US"/>
-              <a:t>Fourth level</a:t>
-            </a:r>
-          </a:p>
-          <a:p>
-            <a:pPr lvl="4"/>
-            <a:r>
-              <a:rPr lang="en-US"/>
-              <a:t>Fifth level</a:t>
-            </a:r>
-          </a:p>
-        </p:txBody>
-      </p:sp>
-      <p:sp>
-        <p:nvSpPr>
-          <p:cNvPr id="6" name="Footer Placeholder 5"/>
-          <p:cNvSpPr>
-            <a:spLocks noGrp="1"/>
-          </p:cNvSpPr>
-          <p:nvPr>
-            <p:ph type="ftr" sz="quarter" idx="4"/>
-          </p:nvPr>
-        </p:nvSpPr>
-        <p:spPr>
-          <a:xfrm>
-            <a:off x="0" y="8685213"/>
-            <a:ext cx="2971800" cy="458787"/>
-          </a:xfrm>
-          <a:prstGeom prst="rect">
-            <a:avLst/>
-          </a:prstGeom>
-        </p:spPr>
-        <p:txBody>
-          <a:bodyPr vert="horz" lIns="91440" tIns="45720" rIns="91440" bIns="45720" rtlCol="0" anchor="b"/>
-          <a:lstStyle>
-            <a:lvl1pPr algn="l">
-              <a:defRPr sz="1200"/>
-            </a:lvl1pPr>
-          </a:lstStyle>
-          <a:p>
-            <a:endParaRPr lang="en-US"/>
-          </a:p>
-        </p:txBody>
-      </p:sp>
-      <p:sp>
-        <p:nvSpPr>
-          <p:cNvPr id="7" name="Slide Number Placeholder 6"/>
-          <p:cNvSpPr>
-            <a:spLocks noGrp="1"/>
-          </p:cNvSpPr>
-          <p:nvPr>
-            <p:ph type="sldNum" sz="quarter" idx="5"/>
-          </p:nvPr>
-        </p:nvSpPr>
-        <p:spPr>
-          <a:xfrm>
-            <a:off x="3884613" y="8685213"/>
-            <a:ext cx="2971800" cy="458787"/>
-          </a:xfrm>
-          <a:prstGeom prst="rect">
-            <a:avLst/>
-          </a:prstGeom>
-        </p:spPr>
-        <p:txBody>
-          <a:bodyPr vert="horz" lIns="91440" tIns="45720" rIns="91440" bIns="45720" rtlCol="0" anchor="b"/>
-          <a:lstStyle>
-            <a:lvl1pPr algn="r">
-              <a:defRPr sz="1200"/>
-            </a:lvl1pPr>
-          </a:lstStyle>
-          <a:p>
-            <a:fld id="{CE5E9CC1-C706-0F49-92D6-E571CC5EEA8F}" type="slidenum">
-              <a:rPr lang="en-US"/>
-              <a:t>‹#›</a:t>
-            </a:fld>
-            <a:endParaRPr lang="en-US"/>
-          </a:p>
-        </p:txBody>
-      </p:sp>
     </p:spTree>
     <p:extLst>
       <p:ext uri="{BB962C8B-B14F-4D97-AF65-F5344CB8AC3E}">
-        <p14:creationId xmlns:p14="http://schemas.microsoft.com/office/powerpoint/2010/main" val="1024086991"/>
+        <p14:creationId xmlns:p14="http://schemas.microsoft.com/office/powerpoint/2010/main" val="719306823"/>
       </p:ext>
     </p:extLst>
   </p:cSld>
@@ -432,10 +310,6 @@
           <a:bodyPr/>
           <a:lstStyle/>
           <a:p>
-            <a:r>
-              <a:rPr lang="en-US" dirty="0"/>
-              <a:t/>
-            </a:r>
             <a:endParaRPr lang="en-US" dirty="0"/>
           </a:p>
         </p:txBody>
@@ -520,10 +394,6 @@
           <a:bodyPr/>
           <a:lstStyle/>
           <a:p>
-            <a:r>
-              <a:rPr lang="en-US" dirty="0"/>
-              <a:t/>
-            </a:r>
             <a:endParaRPr lang="en-US" dirty="0"/>
           </a:p>
         </p:txBody>
@@ -608,10 +478,6 @@
           <a:bodyPr/>
           <a:lstStyle/>
           <a:p>
-            <a:r>
-              <a:rPr lang="en-US" dirty="0"/>
-              <a:t/>
-            </a:r>
             <a:endParaRPr lang="en-US" dirty="0"/>
           </a:p>
         </p:txBody>
@@ -696,10 +562,6 @@
           <a:bodyPr/>
           <a:lstStyle/>
           <a:p>
-            <a:r>
-              <a:rPr lang="en-US" dirty="0"/>
-              <a:t/>
-            </a:r>
             <a:endParaRPr lang="en-US" dirty="0"/>
           </a:p>
         </p:txBody>
@@ -784,10 +646,6 @@
           <a:bodyPr/>
           <a:lstStyle/>
           <a:p>
-            <a:r>
-              <a:rPr lang="en-US" dirty="0"/>
-              <a:t/>
-            </a:r>
             <a:endParaRPr lang="en-US" dirty="0"/>
           </a:p>
         </p:txBody>
@@ -872,10 +730,6 @@
           <a:bodyPr/>
           <a:lstStyle/>
           <a:p>
-            <a:r>
-              <a:rPr lang="en-US" dirty="0"/>
-              <a:t/>
-            </a:r>
             <a:endParaRPr lang="en-US" dirty="0"/>
           </a:p>
         </p:txBody>
@@ -960,10 +814,6 @@
           <a:bodyPr/>
           <a:lstStyle/>
           <a:p>
-            <a:r>
-              <a:rPr lang="en-US" dirty="0"/>
-              <a:t/>
-            </a:r>
             <a:endParaRPr lang="en-US" dirty="0"/>
           </a:p>
         </p:txBody>
@@ -1048,10 +898,6 @@
           <a:bodyPr/>
           <a:lstStyle/>
           <a:p>
-            <a:r>
-              <a:rPr lang="en-US" dirty="0"/>
-              <a:t/>
-            </a:r>
             <a:endParaRPr lang="en-US" dirty="0"/>
           </a:p>
         </p:txBody>
@@ -1136,10 +982,6 @@
           <a:bodyPr/>
           <a:lstStyle/>
           <a:p>
-            <a:r>
-              <a:rPr lang="en-US" dirty="0"/>
-              <a:t/>
-            </a:r>
             <a:endParaRPr lang="en-US" dirty="0"/>
           </a:p>
         </p:txBody>
@@ -1224,10 +1066,6 @@
           <a:bodyPr/>
           <a:lstStyle/>
           <a:p>
-            <a:r>
-              <a:rPr lang="en-US" dirty="0"/>
-              <a:t/>
-            </a:r>
             <a:endParaRPr lang="en-US" dirty="0"/>
           </a:p>
         </p:txBody>
@@ -1312,10 +1150,6 @@
           <a:bodyPr/>
           <a:lstStyle/>
           <a:p>
-            <a:r>
-              <a:rPr lang="en-US" dirty="0"/>
-              <a:t/>
-            </a:r>
             <a:endParaRPr lang="en-US" dirty="0"/>
           </a:p>
         </p:txBody>
@@ -1400,10 +1234,6 @@
           <a:bodyPr/>
           <a:lstStyle/>
           <a:p>
-            <a:r>
-              <a:rPr lang="en-US" dirty="0"/>
-              <a:t/>
-            </a:r>
             <a:endParaRPr lang="en-US" dirty="0"/>
           </a:p>
         </p:txBody>
@@ -1488,10 +1318,6 @@
           <a:bodyPr/>
           <a:lstStyle/>
           <a:p>
-            <a:r>
-              <a:rPr lang="en-US" dirty="0"/>
-              <a:t/>
-            </a:r>
             <a:endParaRPr lang="en-US" dirty="0"/>
           </a:p>
         </p:txBody>
@@ -1576,10 +1402,6 @@
           <a:bodyPr/>
           <a:lstStyle/>
           <a:p>
-            <a:r>
-              <a:rPr lang="en-US" dirty="0"/>
-              <a:t/>
-            </a:r>
             <a:endParaRPr lang="en-US" dirty="0"/>
           </a:p>
         </p:txBody>
@@ -1664,10 +1486,6 @@
           <a:bodyPr/>
           <a:lstStyle/>
           <a:p>
-            <a:r>
-              <a:rPr lang="en-US" dirty="0"/>
-              <a:t/>
-            </a:r>
             <a:endParaRPr lang="en-US" dirty="0"/>
           </a:p>
         </p:txBody>
@@ -1735,6 +1553,18 @@
   <p:clrMapOvr>
     <a:masterClrMapping/>
   </p:clrMapOvr>
+  <mc:AlternateContent xmlns:mc="http://schemas.openxmlformats.org/markup-compatibility/2006">
+    <mc:Choice xmlns:p159="http://schemas.microsoft.com/office/powerpoint/2015/09/main" Requires="p159">
+      <p:transition spd="slow">
+        <p159:morph option="byObject"/>
+      </p:transition>
+    </mc:Choice>
+    <mc:Fallback>
+      <p:transition spd="slow">
+        <p:fade/>
+      </p:transition>
+    </mc:Fallback>
+  </mc:AlternateContent>
 </p:sldLayout>
 </file>
 
@@ -1746,6 +1576,7 @@
         <a:solidFill>
           <a:srgbClr val="FFFFFF"/>
         </a:solidFill>
+        <a:effectLst/>
       </p:bgPr>
     </p:bg>
     <p:spTree>
@@ -1767,12 +1598,29 @@
   <p:clrMapOvr>
     <a:masterClrMapping/>
   </p:clrMapOvr>
+  <mc:AlternateContent xmlns:mc="http://schemas.openxmlformats.org/markup-compatibility/2006">
+    <mc:Choice xmlns:p159="http://schemas.microsoft.com/office/powerpoint/2015/09/main" Requires="p159">
+      <p:transition spd="slow">
+        <p159:morph option="byObject"/>
+      </p:transition>
+    </mc:Choice>
+    <mc:Fallback>
+      <p:transition spd="slow">
+        <p:fade/>
+      </p:transition>
+    </mc:Fallback>
+  </mc:AlternateContent>
 </p:sldLayout>
 </file>
 
 <file path=ppt/slideMasters/slideMaster1.xml><?xml version="1.0" encoding="utf-8"?>
 <p:sldMaster xmlns:a="http://schemas.openxmlformats.org/drawingml/2006/main" xmlns:r="http://schemas.openxmlformats.org/officeDocument/2006/relationships" xmlns:p="http://schemas.openxmlformats.org/presentationml/2006/main">
   <p:cSld>
+    <p:bg>
+      <p:bgRef idx="1001">
+        <a:schemeClr val="bg1"/>
+      </p:bgRef>
+    </p:bg>
     <p:spTree>
       <p:nvGrpSpPr>
         <p:cNvPr id="1" name=""/>
@@ -1794,6 +1642,18 @@
     <p:sldLayoutId id="2147483649" r:id="rId1"/>
     <p:sldLayoutId id="2147483650" r:id="rId2"/>
   </p:sldLayoutIdLst>
+  <mc:AlternateContent xmlns:mc="http://schemas.openxmlformats.org/markup-compatibility/2006">
+    <mc:Choice xmlns:p159="http://schemas.microsoft.com/office/powerpoint/2015/09/main" Requires="p159">
+      <p:transition spd="slow">
+        <p159:morph option="byObject"/>
+      </p:transition>
+    </mc:Choice>
+    <mc:Fallback>
+      <p:transition spd="slow">
+        <p:fade/>
+      </p:transition>
+    </mc:Fallback>
+  </mc:AlternateContent>
   <p:hf sldNum="0" hdr="0" ftr="0" dt="0"/>
   <p:txStyles>
     <p:titleStyle>
@@ -2067,15 +1927,15 @@
       </p:grpSpPr>
       <p:pic>
         <p:nvPicPr>
-          <p:cNvPr id="2" name="Image 0" descr="https://kimi-img.moonshot.cn/pub/slides/okc/4p276auw2u64e/mnt/agents/output/llm_detection_review/images/cover_bg.png">    </p:cNvPr>
+          <p:cNvPr id="2" name="Image 0" descr="https://kimi-img.moonshot.cn/pub/slides/okc/4p276auw2u64e/mnt/agents/output/llm_detection_review/images/cover_bg.png"/>
           <p:cNvPicPr>
             <a:picLocks noChangeAspect="1"/>
           </p:cNvPicPr>
           <p:nvPr/>
         </p:nvPicPr>
         <p:blipFill>
-          <a:blip r:embed="rId1"/>
-          <a:srcRect l="0" r="0" t="0" b="0"/>
+          <a:blip r:embed="rId3"/>
+          <a:srcRect/>
           <a:stretch/>
         </p:blipFill>
         <p:spPr>
@@ -2102,7 +1962,7 @@
           <a:prstGeom prst="rect">
             <a:avLst/>
           </a:prstGeom>
-          <a:gradFill rotWithShape="1" flip="none">
+          <a:gradFill flip="none" rotWithShape="1">
             <a:gsLst>
               <a:gs pos="0">
                 <a:srgbClr val="080C17">
@@ -2172,7 +2032,7 @@
               </a:lnSpc>
             </a:pPr>
             <a:r>
-              <a:rPr lang="en-US" sz="1400" spc="300" kern="0" dirty="0">
+              <a:rPr lang="en-US" sz="1400" kern="0" spc="300" dirty="0">
                 <a:solidFill>
                   <a:srgbClr val="FF6B35"/>
                 </a:solidFill>
@@ -2213,7 +2073,7 @@
               </a:lnSpc>
             </a:pPr>
             <a:r>
-              <a:rPr lang="en-US" sz="5200" b="1" spc="100" kern="0" dirty="0">
+              <a:rPr lang="en-US" sz="5200" b="1" kern="0" spc="100" dirty="0">
                 <a:solidFill>
                   <a:srgbClr val="F1F5F9"/>
                 </a:solidFill>
@@ -2254,7 +2114,7 @@
               </a:lnSpc>
             </a:pPr>
             <a:r>
-              <a:rPr lang="en-US" sz="5200" b="1" spc="100" kern="0" dirty="0">
+              <a:rPr lang="en-US" sz="5200" b="1" kern="0" spc="100" dirty="0">
                 <a:solidFill>
                   <a:srgbClr val="F1F5F9"/>
                 </a:solidFill>
@@ -2366,11 +2226,6 @@
               </a:rPr>
               <a:t>Jawwad Ahmad</a:t>
             </a:r>
-            <a:pPr>
-              <a:lnSpc>
-                <a:spcPct val="160000"/>
-              </a:lnSpc>
-            </a:pPr>
             <a:r>
               <a:rPr lang="en-US" sz="1600" dirty="0">
                 <a:solidFill>
@@ -2401,11 +2256,6 @@
               </a:rPr>
               <a:t>Supervisor: </a:t>
             </a:r>
-            <a:pPr>
-              <a:lnSpc>
-                <a:spcPct val="160000"/>
-              </a:lnSpc>
-            </a:pPr>
             <a:r>
               <a:rPr lang="en-US" sz="1600" b="1" dirty="0">
                 <a:solidFill>
@@ -2487,7 +2337,7 @@
               </a:lnSpc>
             </a:pPr>
             <a:r>
-              <a:rPr lang="en-US" sz="1300" spc="100" kern="0" dirty="0">
+              <a:rPr lang="en-US" sz="1300" kern="0" spc="100" dirty="0">
                 <a:solidFill>
                   <a:srgbClr val="94A3B8"/>
                 </a:solidFill>
@@ -2572,10 +2422,18 @@
   <p:clrMapOvr>
     <a:masterClrMapping/>
   </p:clrMapOvr>
-  <p:transition>
-    <p:fade/>
-    <p:spd val="med"/>
-  </p:transition>
+  <mc:AlternateContent xmlns:mc="http://schemas.openxmlformats.org/markup-compatibility/2006">
+    <mc:Choice xmlns:p159="http://schemas.microsoft.com/office/powerpoint/2015/09/main" Requires="p159">
+      <p:transition spd="slow">
+        <p159:morph option="byObject"/>
+      </p:transition>
+    </mc:Choice>
+    <mc:Fallback>
+      <p:transition spd="slow">
+        <p:fade/>
+      </p:transition>
+    </mc:Fallback>
+  </mc:AlternateContent>
 </p:sld>
 </file>
 
@@ -2587,6 +2445,7 @@
         <a:solidFill>
           <a:srgbClr val="080C17"/>
         </a:solidFill>
+        <a:effectLst/>
       </p:bgPr>
     </p:bg>
     <p:spTree>
@@ -2650,7 +2509,7 @@
               </a:lnSpc>
             </a:pPr>
             <a:r>
-              <a:rPr lang="en-US" sz="1200" spc="100" kern="0" dirty="0">
+              <a:rPr lang="en-US" sz="1200" kern="0" spc="100" dirty="0">
                 <a:solidFill>
                   <a:srgbClr val="94A3B8"/>
                 </a:solidFill>
@@ -2691,7 +2550,7 @@
               </a:lnSpc>
             </a:pPr>
             <a:r>
-              <a:rPr lang="en-US" sz="1200" spc="100" kern="0" dirty="0">
+              <a:rPr lang="en-US" sz="1200" kern="0" spc="100" dirty="0">
                 <a:solidFill>
                   <a:srgbClr val="94A3B8"/>
                 </a:solidFill>
@@ -2732,7 +2591,7 @@
               </a:lnSpc>
             </a:pPr>
             <a:r>
-              <a:rPr lang="en-US" sz="1200" spc="100" kern="0" dirty="0">
+              <a:rPr lang="en-US" sz="1200" kern="0" spc="100" dirty="0">
                 <a:solidFill>
                   <a:srgbClr val="F1F5F9"/>
                 </a:solidFill>
@@ -2793,7 +2652,7 @@
               </a:lnSpc>
             </a:pPr>
             <a:r>
-              <a:rPr lang="en-US" sz="1200" spc="100" kern="0" dirty="0">
+              <a:rPr lang="en-US" sz="1200" kern="0" spc="100" dirty="0">
                 <a:solidFill>
                   <a:srgbClr val="94A3B8"/>
                 </a:solidFill>
@@ -3952,11 +3811,6 @@
               </a:rPr>
               <a:t>Mohammadi et al. (2025) — The Adversarial Paradox:</a:t>
             </a:r>
-            <a:pPr>
-              <a:lnSpc>
-                <a:spcPct val="150000"/>
-              </a:lnSpc>
-            </a:pPr>
             <a:r>
               <a:rPr lang="en-US" sz="1500" dirty="0">
                 <a:solidFill>
@@ -4018,10 +3872,18 @@
   <p:clrMapOvr>
     <a:masterClrMapping/>
   </p:clrMapOvr>
-  <p:transition>
-    <p:fade/>
-    <p:spd val="med"/>
-  </p:transition>
+  <mc:AlternateContent xmlns:mc="http://schemas.openxmlformats.org/markup-compatibility/2006">
+    <mc:Choice xmlns:p159="http://schemas.microsoft.com/office/powerpoint/2015/09/main" Requires="p159">
+      <p:transition spd="slow">
+        <p159:morph option="byObject"/>
+      </p:transition>
+    </mc:Choice>
+    <mc:Fallback>
+      <p:transition spd="slow">
+        <p:fade/>
+      </p:transition>
+    </mc:Fallback>
+  </mc:AlternateContent>
 </p:sld>
 </file>
 
@@ -4033,6 +3895,7 @@
         <a:solidFill>
           <a:srgbClr val="080C17"/>
         </a:solidFill>
+        <a:effectLst/>
       </p:bgPr>
     </p:bg>
     <p:spTree>
@@ -4096,7 +3959,7 @@
               </a:lnSpc>
             </a:pPr>
             <a:r>
-              <a:rPr lang="en-US" sz="1200" spc="100" kern="0" dirty="0">
+              <a:rPr lang="en-US" sz="1200" kern="0" spc="100" dirty="0">
                 <a:solidFill>
                   <a:srgbClr val="94A3B8"/>
                 </a:solidFill>
@@ -4137,7 +4000,7 @@
               </a:lnSpc>
             </a:pPr>
             <a:r>
-              <a:rPr lang="en-US" sz="1200" spc="100" kern="0" dirty="0">
+              <a:rPr lang="en-US" sz="1200" kern="0" spc="100" dirty="0">
                 <a:solidFill>
                   <a:srgbClr val="94A3B8"/>
                 </a:solidFill>
@@ -4178,7 +4041,7 @@
               </a:lnSpc>
             </a:pPr>
             <a:r>
-              <a:rPr lang="en-US" sz="1200" spc="100" kern="0" dirty="0">
+              <a:rPr lang="en-US" sz="1200" kern="0" spc="100" dirty="0">
                 <a:solidFill>
                   <a:srgbClr val="F1F5F9"/>
                 </a:solidFill>
@@ -4239,7 +4102,7 @@
               </a:lnSpc>
             </a:pPr>
             <a:r>
-              <a:rPr lang="en-US" sz="1200" spc="100" kern="0" dirty="0">
+              <a:rPr lang="en-US" sz="1200" kern="0" spc="100" dirty="0">
                 <a:solidFill>
                   <a:srgbClr val="94A3B8"/>
                 </a:solidFill>
@@ -5300,10 +5163,18 @@
   <p:clrMapOvr>
     <a:masterClrMapping/>
   </p:clrMapOvr>
-  <p:transition>
-    <p:fade/>
-    <p:spd val="med"/>
-  </p:transition>
+  <mc:AlternateContent xmlns:mc="http://schemas.openxmlformats.org/markup-compatibility/2006">
+    <mc:Choice xmlns:p159="http://schemas.microsoft.com/office/powerpoint/2015/09/main" Requires="p159">
+      <p:transition spd="slow">
+        <p159:morph option="byObject"/>
+      </p:transition>
+    </mc:Choice>
+    <mc:Fallback>
+      <p:transition spd="slow">
+        <p:fade/>
+      </p:transition>
+    </mc:Fallback>
+  </mc:AlternateContent>
 </p:sld>
 </file>
 
@@ -5315,6 +5186,7 @@
         <a:solidFill>
           <a:srgbClr val="080C17"/>
         </a:solidFill>
+        <a:effectLst/>
       </p:bgPr>
     </p:bg>
     <p:spTree>
@@ -5378,7 +5250,7 @@
               </a:lnSpc>
             </a:pPr>
             <a:r>
-              <a:rPr lang="en-US" sz="1200" spc="100" kern="0" dirty="0">
+              <a:rPr lang="en-US" sz="1200" kern="0" spc="100" dirty="0">
                 <a:solidFill>
                   <a:srgbClr val="94A3B8"/>
                 </a:solidFill>
@@ -5419,7 +5291,7 @@
               </a:lnSpc>
             </a:pPr>
             <a:r>
-              <a:rPr lang="en-US" sz="1200" spc="100" kern="0" dirty="0">
+              <a:rPr lang="en-US" sz="1200" kern="0" spc="100" dirty="0">
                 <a:solidFill>
                   <a:srgbClr val="94A3B8"/>
                 </a:solidFill>
@@ -5460,7 +5332,7 @@
               </a:lnSpc>
             </a:pPr>
             <a:r>
-              <a:rPr lang="en-US" sz="1200" spc="100" kern="0" dirty="0">
+              <a:rPr lang="en-US" sz="1200" kern="0" spc="100" dirty="0">
                 <a:solidFill>
                   <a:srgbClr val="F1F5F9"/>
                 </a:solidFill>
@@ -5521,7 +5393,7 @@
               </a:lnSpc>
             </a:pPr>
             <a:r>
-              <a:rPr lang="en-US" sz="1200" spc="100" kern="0" dirty="0">
+              <a:rPr lang="en-US" sz="1200" kern="0" spc="100" dirty="0">
                 <a:solidFill>
                   <a:srgbClr val="94A3B8"/>
                 </a:solidFill>
@@ -5619,9 +5491,27 @@
             <a:tbl>
               <a:tblPr/>
               <a:tblGrid>
-                <a:gridCol w="4419600"/>
-                <a:gridCol w="6629400"/>
-                <a:gridCol w="3683000"/>
+                <a:gridCol w="4419600">
+                  <a:extLst>
+                    <a:ext uri="{9D8B030D-6E8A-4147-A177-3AD203B41FA5}">
+                      <a16:colId xmlns:a16="http://schemas.microsoft.com/office/drawing/2014/main" val="20000"/>
+                    </a:ext>
+                  </a:extLst>
+                </a:gridCol>
+                <a:gridCol w="6629400">
+                  <a:extLst>
+                    <a:ext uri="{9D8B030D-6E8A-4147-A177-3AD203B41FA5}">
+                      <a16:colId xmlns:a16="http://schemas.microsoft.com/office/drawing/2014/main" val="20001"/>
+                    </a:ext>
+                  </a:extLst>
+                </a:gridCol>
+                <a:gridCol w="3683000">
+                  <a:extLst>
+                    <a:ext uri="{9D8B030D-6E8A-4147-A177-3AD203B41FA5}">
+                      <a16:colId xmlns:a16="http://schemas.microsoft.com/office/drawing/2014/main" val="20002"/>
+                    </a:ext>
+                  </a:extLst>
+                </a:gridCol>
               </a:tblGrid>
               <a:tr h="548652">
                 <a:tc>
@@ -5648,7 +5538,7 @@
                       </a:endParaRPr>
                     </a:p>
                   </a:txBody>
-                  <a:tcPr marL="91440" marR="91440" marT="0" marB="0" anchor="ctr">
+                  <a:tcPr marT="0" marB="0" anchor="ctr">
                     <a:lnL w="12700" cap="flat" cmpd="sng" algn="ctr">
                       <a:solidFill>
                         <a:srgbClr val="1E293B"/>
@@ -5714,7 +5604,7 @@
                       </a:endParaRPr>
                     </a:p>
                   </a:txBody>
-                  <a:tcPr marL="91440" marR="91440" marT="0" marB="0" anchor="ctr">
+                  <a:tcPr marT="0" marB="0" anchor="ctr">
                     <a:lnL w="12700" cap="flat" cmpd="sng" algn="ctr">
                       <a:solidFill>
                         <a:srgbClr val="1E293B"/>
@@ -5780,7 +5670,7 @@
                       </a:endParaRPr>
                     </a:p>
                   </a:txBody>
-                  <a:tcPr marL="91440" marR="91440" marT="0" marB="0" anchor="ctr">
+                  <a:tcPr marT="0" marB="0" anchor="ctr">
                     <a:lnL w="12700" cap="flat" cmpd="sng" algn="ctr">
                       <a:solidFill>
                         <a:srgbClr val="1E293B"/>
@@ -5822,6 +5712,11 @@
                     </a:solidFill>
                   </a:tcPr>
                 </a:tc>
+                <a:extLst>
+                  <a:ext uri="{0D108BD9-81ED-4DB2-BD59-A6C34878D82A}">
+                    <a16:rowId xmlns:a16="http://schemas.microsoft.com/office/drawing/2014/main" val="10000"/>
+                  </a:ext>
+                </a:extLst>
               </a:tr>
               <a:tr h="701764">
                 <a:tc>
@@ -5848,7 +5743,7 @@
                       </a:endParaRPr>
                     </a:p>
                   </a:txBody>
-                  <a:tcPr marL="91440" marR="91440" marT="0" marB="0" anchor="ctr">
+                  <a:tcPr marT="0" marB="0" anchor="ctr">
                     <a:lnL w="12700" cap="flat" cmpd="sng" algn="ctr">
                       <a:solidFill>
                         <a:srgbClr val="1E293B"/>
@@ -5914,7 +5809,7 @@
                       </a:endParaRPr>
                     </a:p>
                   </a:txBody>
-                  <a:tcPr marL="91440" marR="91440" marT="0" marB="0" anchor="ctr">
+                  <a:tcPr marT="0" marB="0" anchor="ctr">
                     <a:lnL w="12700" cap="flat" cmpd="sng" algn="ctr">
                       <a:solidFill>
                         <a:srgbClr val="1E293B"/>
@@ -5980,7 +5875,7 @@
                       </a:endParaRPr>
                     </a:p>
                   </a:txBody>
-                  <a:tcPr marL="91440" marR="91440" marT="0" marB="0" anchor="ctr">
+                  <a:tcPr marT="0" marB="0" anchor="ctr">
                     <a:lnL w="12700" cap="flat" cmpd="sng" algn="ctr">
                       <a:solidFill>
                         <a:srgbClr val="1E293B"/>
@@ -6022,6 +5917,11 @@
                     </a:solidFill>
                   </a:tcPr>
                 </a:tc>
+                <a:extLst>
+                  <a:ext uri="{0D108BD9-81ED-4DB2-BD59-A6C34878D82A}">
+                    <a16:rowId xmlns:a16="http://schemas.microsoft.com/office/drawing/2014/main" val="10001"/>
+                  </a:ext>
+                </a:extLst>
               </a:tr>
               <a:tr h="701764">
                 <a:tc>
@@ -6048,7 +5948,7 @@
                       </a:endParaRPr>
                     </a:p>
                   </a:txBody>
-                  <a:tcPr marL="91440" marR="91440" marT="0" marB="0" anchor="ctr">
+                  <a:tcPr marT="0" marB="0" anchor="ctr">
                     <a:lnL w="12700" cap="flat" cmpd="sng" algn="ctr">
                       <a:solidFill>
                         <a:srgbClr val="1E293B"/>
@@ -6114,7 +6014,7 @@
                       </a:endParaRPr>
                     </a:p>
                   </a:txBody>
-                  <a:tcPr marL="91440" marR="91440" marT="0" marB="0" anchor="ctr">
+                  <a:tcPr marT="0" marB="0" anchor="ctr">
                     <a:lnL w="12700" cap="flat" cmpd="sng" algn="ctr">
                       <a:solidFill>
                         <a:srgbClr val="1E293B"/>
@@ -6180,7 +6080,7 @@
                       </a:endParaRPr>
                     </a:p>
                   </a:txBody>
-                  <a:tcPr marL="91440" marR="91440" marT="0" marB="0" anchor="ctr">
+                  <a:tcPr marT="0" marB="0" anchor="ctr">
                     <a:lnL w="12700" cap="flat" cmpd="sng" algn="ctr">
                       <a:solidFill>
                         <a:srgbClr val="1E293B"/>
@@ -6222,6 +6122,11 @@
                     </a:solidFill>
                   </a:tcPr>
                 </a:tc>
+                <a:extLst>
+                  <a:ext uri="{0D108BD9-81ED-4DB2-BD59-A6C34878D82A}">
+                    <a16:rowId xmlns:a16="http://schemas.microsoft.com/office/drawing/2014/main" val="10002"/>
+                  </a:ext>
+                </a:extLst>
               </a:tr>
               <a:tr h="701764">
                 <a:tc>
@@ -6248,7 +6153,7 @@
                       </a:endParaRPr>
                     </a:p>
                   </a:txBody>
-                  <a:tcPr marL="91440" marR="91440" marT="0" marB="0" anchor="ctr">
+                  <a:tcPr marT="0" marB="0" anchor="ctr">
                     <a:lnL w="12700" cap="flat" cmpd="sng" algn="ctr">
                       <a:solidFill>
                         <a:srgbClr val="1E293B"/>
@@ -6314,7 +6219,7 @@
                       </a:endParaRPr>
                     </a:p>
                   </a:txBody>
-                  <a:tcPr marL="91440" marR="91440" marT="0" marB="0" anchor="ctr">
+                  <a:tcPr marT="0" marB="0" anchor="ctr">
                     <a:lnL w="12700" cap="flat" cmpd="sng" algn="ctr">
                       <a:solidFill>
                         <a:srgbClr val="1E293B"/>
@@ -6380,7 +6285,7 @@
                       </a:endParaRPr>
                     </a:p>
                   </a:txBody>
-                  <a:tcPr marL="91440" marR="91440" marT="0" marB="0" anchor="ctr">
+                  <a:tcPr marT="0" marB="0" anchor="ctr">
                     <a:lnL w="12700" cap="flat" cmpd="sng" algn="ctr">
                       <a:solidFill>
                         <a:srgbClr val="1E293B"/>
@@ -6422,6 +6327,11 @@
                     </a:solidFill>
                   </a:tcPr>
                 </a:tc>
+                <a:extLst>
+                  <a:ext uri="{0D108BD9-81ED-4DB2-BD59-A6C34878D82A}">
+                    <a16:rowId xmlns:a16="http://schemas.microsoft.com/office/drawing/2014/main" val="10003"/>
+                  </a:ext>
+                </a:extLst>
               </a:tr>
               <a:tr h="701764">
                 <a:tc>
@@ -6448,7 +6358,7 @@
                       </a:endParaRPr>
                     </a:p>
                   </a:txBody>
-                  <a:tcPr marL="91440" marR="91440" marT="0" marB="0" anchor="ctr">
+                  <a:tcPr marT="0" marB="0" anchor="ctr">
                     <a:lnL w="12700" cap="flat" cmpd="sng" algn="ctr">
                       <a:solidFill>
                         <a:srgbClr val="1E293B"/>
@@ -6514,7 +6424,7 @@
                       </a:endParaRPr>
                     </a:p>
                   </a:txBody>
-                  <a:tcPr marL="91440" marR="91440" marT="0" marB="0" anchor="ctr">
+                  <a:tcPr marT="0" marB="0" anchor="ctr">
                     <a:lnL w="12700" cap="flat" cmpd="sng" algn="ctr">
                       <a:solidFill>
                         <a:srgbClr val="1E293B"/>
@@ -6580,7 +6490,7 @@
                       </a:endParaRPr>
                     </a:p>
                   </a:txBody>
-                  <a:tcPr marL="91440" marR="91440" marT="0" marB="0" anchor="ctr">
+                  <a:tcPr marT="0" marB="0" anchor="ctr">
                     <a:lnL w="12700" cap="flat" cmpd="sng" algn="ctr">
                       <a:solidFill>
                         <a:srgbClr val="1E293B"/>
@@ -6622,6 +6532,11 @@
                     </a:solidFill>
                   </a:tcPr>
                 </a:tc>
+                <a:extLst>
+                  <a:ext uri="{0D108BD9-81ED-4DB2-BD59-A6C34878D82A}">
+                    <a16:rowId xmlns:a16="http://schemas.microsoft.com/office/drawing/2014/main" val="10004"/>
+                  </a:ext>
+                </a:extLst>
               </a:tr>
               <a:tr h="701764">
                 <a:tc>
@@ -6648,7 +6563,7 @@
                       </a:endParaRPr>
                     </a:p>
                   </a:txBody>
-                  <a:tcPr marL="91440" marR="91440" marT="0" marB="0" anchor="ctr">
+                  <a:tcPr marT="0" marB="0" anchor="ctr">
                     <a:lnL w="12700" cap="flat" cmpd="sng" algn="ctr">
                       <a:solidFill>
                         <a:srgbClr val="1E293B"/>
@@ -6714,7 +6629,7 @@
                       </a:endParaRPr>
                     </a:p>
                   </a:txBody>
-                  <a:tcPr marL="91440" marR="91440" marT="0" marB="0" anchor="ctr">
+                  <a:tcPr marT="0" marB="0" anchor="ctr">
                     <a:lnL w="12700" cap="flat" cmpd="sng" algn="ctr">
                       <a:solidFill>
                         <a:srgbClr val="1E293B"/>
@@ -6780,7 +6695,7 @@
                       </a:endParaRPr>
                     </a:p>
                   </a:txBody>
-                  <a:tcPr marL="91440" marR="91440" marT="0" marB="0" anchor="ctr">
+                  <a:tcPr marT="0" marB="0" anchor="ctr">
                     <a:lnL w="12700" cap="flat" cmpd="sng" algn="ctr">
                       <a:solidFill>
                         <a:srgbClr val="1E293B"/>
@@ -6822,6 +6737,11 @@
                     </a:solidFill>
                   </a:tcPr>
                 </a:tc>
+                <a:extLst>
+                  <a:ext uri="{0D108BD9-81ED-4DB2-BD59-A6C34878D82A}">
+                    <a16:rowId xmlns:a16="http://schemas.microsoft.com/office/drawing/2014/main" val="10005"/>
+                  </a:ext>
+                </a:extLst>
               </a:tr>
               <a:tr h="701764">
                 <a:tc>
@@ -6848,7 +6768,7 @@
                       </a:endParaRPr>
                     </a:p>
                   </a:txBody>
-                  <a:tcPr marL="91440" marR="91440" marT="0" marB="0" anchor="ctr">
+                  <a:tcPr marT="0" marB="0" anchor="ctr">
                     <a:lnL w="12700" cap="flat" cmpd="sng" algn="ctr">
                       <a:solidFill>
                         <a:srgbClr val="1E293B"/>
@@ -6914,7 +6834,7 @@
                       </a:endParaRPr>
                     </a:p>
                   </a:txBody>
-                  <a:tcPr marL="91440" marR="91440" marT="0" marB="0" anchor="ctr">
+                  <a:tcPr marT="0" marB="0" anchor="ctr">
                     <a:lnL w="12700" cap="flat" cmpd="sng" algn="ctr">
                       <a:solidFill>
                         <a:srgbClr val="1E293B"/>
@@ -6980,7 +6900,7 @@
                       </a:endParaRPr>
                     </a:p>
                   </a:txBody>
-                  <a:tcPr marL="91440" marR="91440" marT="0" marB="0" anchor="ctr">
+                  <a:tcPr marT="0" marB="0" anchor="ctr">
                     <a:lnL w="12700" cap="flat" cmpd="sng" algn="ctr">
                       <a:solidFill>
                         <a:srgbClr val="1E293B"/>
@@ -7022,6 +6942,11 @@
                     </a:solidFill>
                   </a:tcPr>
                 </a:tc>
+                <a:extLst>
+                  <a:ext uri="{0D108BD9-81ED-4DB2-BD59-A6C34878D82A}">
+                    <a16:rowId xmlns:a16="http://schemas.microsoft.com/office/drawing/2014/main" val="10006"/>
+                  </a:ext>
+                </a:extLst>
               </a:tr>
               <a:tr h="701764">
                 <a:tc>
@@ -7048,7 +6973,7 @@
                       </a:endParaRPr>
                     </a:p>
                   </a:txBody>
-                  <a:tcPr marL="91440" marR="91440" marT="0" marB="0" anchor="ctr">
+                  <a:tcPr marT="0" marB="0" anchor="ctr">
                     <a:lnL w="12700" cap="flat" cmpd="sng" algn="ctr">
                       <a:solidFill>
                         <a:srgbClr val="1E293B"/>
@@ -7114,7 +7039,7 @@
                       </a:endParaRPr>
                     </a:p>
                   </a:txBody>
-                  <a:tcPr marL="91440" marR="91440" marT="0" marB="0" anchor="ctr">
+                  <a:tcPr marT="0" marB="0" anchor="ctr">
                     <a:lnL w="12700" cap="flat" cmpd="sng" algn="ctr">
                       <a:solidFill>
                         <a:srgbClr val="1E293B"/>
@@ -7180,7 +7105,7 @@
                       </a:endParaRPr>
                     </a:p>
                   </a:txBody>
-                  <a:tcPr marL="91440" marR="91440" marT="0" marB="0" anchor="ctr">
+                  <a:tcPr marT="0" marB="0" anchor="ctr">
                     <a:lnL w="12700" cap="flat" cmpd="sng" algn="ctr">
                       <a:solidFill>
                         <a:srgbClr val="1E293B"/>
@@ -7222,6 +7147,11 @@
                     </a:solidFill>
                   </a:tcPr>
                 </a:tc>
+                <a:extLst>
+                  <a:ext uri="{0D108BD9-81ED-4DB2-BD59-A6C34878D82A}">
+                    <a16:rowId xmlns:a16="http://schemas.microsoft.com/office/drawing/2014/main" val="10007"/>
+                  </a:ext>
+                </a:extLst>
               </a:tr>
             </a:tbl>
           </a:graphicData>
@@ -7274,7 +7204,7 @@
       </p:sp>
       <p:sp>
         <p:nvSpPr>
-          <p:cNvPr id="13" name="Text 10"/>
+          <p:cNvPr id="10" name="Text 10"/>
           <p:cNvSpPr/>
           <p:nvPr/>
         </p:nvSpPr>
@@ -7309,11 +7239,6 @@
               </a:rPr>
               <a:t>★</a:t>
             </a:r>
-            <a:pPr>
-              <a:lnSpc>
-                <a:spcPct val="100000"/>
-              </a:lnSpc>
-            </a:pPr>
             <a:r>
               <a:rPr lang="en-US" sz="1500" dirty="0">
                 <a:solidFill>
@@ -7325,11 +7250,6 @@
               </a:rPr>
               <a:t> </a:t>
             </a:r>
-            <a:pPr>
-              <a:lnSpc>
-                <a:spcPct val="100000"/>
-              </a:lnSpc>
-            </a:pPr>
             <a:r>
               <a:rPr lang="en-US" sz="1500" b="1" dirty="0">
                 <a:solidFill>
@@ -7341,11 +7261,6 @@
               </a:rPr>
               <a:t>Grammatical standardization</a:t>
             </a:r>
-            <a:pPr>
-              <a:lnSpc>
-                <a:spcPct val="100000"/>
-              </a:lnSpc>
-            </a:pPr>
             <a:r>
               <a:rPr lang="en-US" sz="1500" dirty="0">
                 <a:solidFill>
@@ -7407,10 +7322,18 @@
   <p:clrMapOvr>
     <a:masterClrMapping/>
   </p:clrMapOvr>
-  <p:transition>
-    <p:fade/>
-    <p:spd val="med"/>
-  </p:transition>
+  <mc:AlternateContent xmlns:mc="http://schemas.openxmlformats.org/markup-compatibility/2006">
+    <mc:Choice xmlns:p159="http://schemas.microsoft.com/office/powerpoint/2015/09/main" Requires="p159">
+      <p:transition spd="slow">
+        <p159:morph option="byObject"/>
+      </p:transition>
+    </mc:Choice>
+    <mc:Fallback>
+      <p:transition spd="slow">
+        <p:fade/>
+      </p:transition>
+    </mc:Fallback>
+  </mc:AlternateContent>
 </p:sld>
 </file>
 
@@ -7433,15 +7356,15 @@
       </p:grpSpPr>
       <p:pic>
         <p:nvPicPr>
-          <p:cNvPr id="2" name="Image 0" descr="https://kimi-img.moonshot.cn/pub/slides/okc/4p276auw2u64e/mnt/agents/output/llm_detection_review/images/3_Abstract_polygonal_brain_on_dark.png">    </p:cNvPr>
+          <p:cNvPr id="2" name="Image 0" descr="https://kimi-img.moonshot.cn/pub/slides/okc/4p276auw2u64e/mnt/agents/output/llm_detection_review/images/3_Abstract_polygonal_brain_on_dark.png"/>
           <p:cNvPicPr>
             <a:picLocks noChangeAspect="1"/>
           </p:cNvPicPr>
           <p:nvPr/>
         </p:nvPicPr>
         <p:blipFill>
-          <a:blip r:embed="rId1"/>
-          <a:srcRect l="0" r="0" t="821" b="821"/>
+          <a:blip r:embed="rId3"/>
+          <a:srcRect t="821" b="821"/>
           <a:stretch/>
         </p:blipFill>
         <p:spPr>
@@ -7468,7 +7391,7 @@
           <a:prstGeom prst="rect">
             <a:avLst/>
           </a:prstGeom>
-          <a:gradFill rotWithShape="1" flip="none">
+          <a:gradFill flip="none" rotWithShape="1">
             <a:gsLst>
               <a:gs pos="0">
                 <a:srgbClr val="080C17">
@@ -7712,10 +7635,18 @@
   <p:clrMapOvr>
     <a:masterClrMapping/>
   </p:clrMapOvr>
-  <p:transition>
-    <p:fade/>
-    <p:spd val="med"/>
-  </p:transition>
+  <mc:AlternateContent xmlns:mc="http://schemas.openxmlformats.org/markup-compatibility/2006">
+    <mc:Choice xmlns:p159="http://schemas.microsoft.com/office/powerpoint/2015/09/main" Requires="p159">
+      <p:transition spd="slow">
+        <p159:morph option="byObject"/>
+      </p:transition>
+    </mc:Choice>
+    <mc:Fallback>
+      <p:transition spd="slow">
+        <p:fade/>
+      </p:transition>
+    </mc:Fallback>
+  </mc:AlternateContent>
 </p:sld>
 </file>
 
@@ -7727,6 +7658,7 @@
         <a:solidFill>
           <a:srgbClr val="080C17"/>
         </a:solidFill>
+        <a:effectLst/>
       </p:bgPr>
     </p:bg>
     <p:spTree>
@@ -7790,7 +7722,7 @@
               </a:lnSpc>
             </a:pPr>
             <a:r>
-              <a:rPr lang="en-US" sz="1200" spc="100" kern="0" dirty="0">
+              <a:rPr lang="en-US" sz="1200" kern="0" spc="100" dirty="0">
                 <a:solidFill>
                   <a:srgbClr val="94A3B8"/>
                 </a:solidFill>
@@ -7831,7 +7763,7 @@
               </a:lnSpc>
             </a:pPr>
             <a:r>
-              <a:rPr lang="en-US" sz="1200" spc="100" kern="0" dirty="0">
+              <a:rPr lang="en-US" sz="1200" kern="0" spc="100" dirty="0">
                 <a:solidFill>
                   <a:srgbClr val="94A3B8"/>
                 </a:solidFill>
@@ -7872,7 +7804,7 @@
               </a:lnSpc>
             </a:pPr>
             <a:r>
-              <a:rPr lang="en-US" sz="1200" spc="100" kern="0" dirty="0">
+              <a:rPr lang="en-US" sz="1200" kern="0" spc="100" dirty="0">
                 <a:solidFill>
                   <a:srgbClr val="94A3B8"/>
                 </a:solidFill>
@@ -7913,7 +7845,7 @@
               </a:lnSpc>
             </a:pPr>
             <a:r>
-              <a:rPr lang="en-US" sz="1200" spc="100" kern="0" dirty="0">
+              <a:rPr lang="en-US" sz="1200" kern="0" spc="100" dirty="0">
                 <a:solidFill>
                   <a:srgbClr val="F1F5F9"/>
                 </a:solidFill>
@@ -9071,11 +9003,6 @@
               </a:rPr>
               <a:t>✓</a:t>
             </a:r>
-            <a:pPr>
-              <a:lnSpc>
-                <a:spcPct val="150000"/>
-              </a:lnSpc>
-            </a:pPr>
             <a:r>
               <a:rPr lang="en-US" sz="1400" dirty="0">
                 <a:solidFill>
@@ -9106,11 +9033,6 @@
               </a:rPr>
               <a:t>✗</a:t>
             </a:r>
-            <a:pPr>
-              <a:lnSpc>
-                <a:spcPct val="150000"/>
-              </a:lnSpc>
-            </a:pPr>
             <a:r>
               <a:rPr lang="en-US" sz="1400" dirty="0">
                 <a:solidFill>
@@ -9258,10 +9180,18 @@
   <p:clrMapOvr>
     <a:masterClrMapping/>
   </p:clrMapOvr>
-  <p:transition>
-    <p:fade/>
-    <p:spd val="med"/>
-  </p:transition>
+  <mc:AlternateContent xmlns:mc="http://schemas.openxmlformats.org/markup-compatibility/2006">
+    <mc:Choice xmlns:p159="http://schemas.microsoft.com/office/powerpoint/2015/09/main" Requires="p159">
+      <p:transition spd="slow">
+        <p159:morph option="byObject"/>
+      </p:transition>
+    </mc:Choice>
+    <mc:Fallback>
+      <p:transition spd="slow">
+        <p:fade/>
+      </p:transition>
+    </mc:Fallback>
+  </mc:AlternateContent>
 </p:sld>
 </file>
 
@@ -9284,15 +9214,15 @@
       </p:grpSpPr>
       <p:pic>
         <p:nvPicPr>
-          <p:cNvPr id="2" name="Image 0" descr="https://kimi-img.moonshot.cn/pub/slides/okc/4p276auw2u64e/mnt/agents/output/llm_detection_review/images/cover_bg.png">    </p:cNvPr>
+          <p:cNvPr id="2" name="Image 0" descr="https://kimi-img.moonshot.cn/pub/slides/okc/4p276auw2u64e/mnt/agents/output/llm_detection_review/images/cover_bg.png"/>
           <p:cNvPicPr>
             <a:picLocks noChangeAspect="1"/>
           </p:cNvPicPr>
           <p:nvPr/>
         </p:nvPicPr>
         <p:blipFill>
-          <a:blip r:embed="rId1"/>
-          <a:srcRect l="0" r="0" t="0" b="0"/>
+          <a:blip r:embed="rId3"/>
+          <a:srcRect/>
           <a:stretch/>
         </p:blipFill>
         <p:spPr>
@@ -9319,7 +9249,7 @@
           <a:prstGeom prst="rect">
             <a:avLst/>
           </a:prstGeom>
-          <a:gradFill rotWithShape="1" flip="none">
+          <a:gradFill flip="none" rotWithShape="1">
             <a:gsLst>
               <a:gs pos="0">
                 <a:srgbClr val="080C17">
@@ -9389,7 +9319,7 @@
               </a:lnSpc>
             </a:pPr>
             <a:r>
-              <a:rPr lang="en-US" sz="6400" b="1" spc="200" kern="0" dirty="0">
+              <a:rPr lang="en-US" sz="6400" b="1" kern="0" spc="200" dirty="0">
                 <a:solidFill>
                   <a:srgbClr val="F1F5F9"/>
                 </a:solidFill>
@@ -9501,11 +9431,6 @@
               </a:rPr>
               <a:t>Jawwad Ahmad</a:t>
             </a:r>
-            <a:pPr algn="ctr">
-              <a:lnSpc>
-                <a:spcPct val="160000"/>
-              </a:lnSpc>
-            </a:pPr>
             <a:r>
               <a:rPr lang="en-US" sz="1600" dirty="0">
                 <a:solidFill>
@@ -9536,11 +9461,6 @@
               </a:rPr>
               <a:t>The Islamia University of Bahawalpur | Supervisor: </a:t>
             </a:r>
-            <a:pPr algn="ctr">
-              <a:lnSpc>
-                <a:spcPct val="160000"/>
-              </a:lnSpc>
-            </a:pPr>
             <a:r>
               <a:rPr lang="en-US" sz="1600" b="1" dirty="0">
                 <a:solidFill>
@@ -10033,10 +9953,18 @@
   <p:clrMapOvr>
     <a:masterClrMapping/>
   </p:clrMapOvr>
-  <p:transition>
-    <p:fade/>
-    <p:spd val="med"/>
-  </p:transition>
+  <mc:AlternateContent xmlns:mc="http://schemas.openxmlformats.org/markup-compatibility/2006">
+    <mc:Choice xmlns:p159="http://schemas.microsoft.com/office/powerpoint/2015/09/main" Requires="p159">
+      <p:transition spd="slow">
+        <p159:morph option="byObject"/>
+      </p:transition>
+    </mc:Choice>
+    <mc:Fallback>
+      <p:transition spd="slow">
+        <p:fade/>
+      </p:transition>
+    </mc:Fallback>
+  </mc:AlternateContent>
 </p:sld>
 </file>
 
@@ -10048,6 +9976,7 @@
         <a:solidFill>
           <a:srgbClr val="080C17"/>
         </a:solidFill>
+        <a:effectLst/>
       </p:bgPr>
     </p:bg>
     <p:spTree>
@@ -10152,7 +10081,7 @@
               </a:lnSpc>
             </a:pPr>
             <a:r>
-              <a:rPr lang="en-US" sz="1400" spc="300" kern="0" dirty="0">
+              <a:rPr lang="en-US" sz="1400" kern="0" spc="300" dirty="0">
                 <a:solidFill>
                   <a:srgbClr val="94A3B8"/>
                 </a:solidFill>
@@ -10858,10 +10787,18 @@
   <p:clrMapOvr>
     <a:masterClrMapping/>
   </p:clrMapOvr>
-  <p:transition>
-    <p:fade/>
-    <p:spd val="med"/>
-  </p:transition>
+  <mc:AlternateContent xmlns:mc="http://schemas.openxmlformats.org/markup-compatibility/2006">
+    <mc:Choice xmlns:p159="http://schemas.microsoft.com/office/powerpoint/2015/09/main" Requires="p159">
+      <p:transition spd="slow">
+        <p159:morph option="byObject"/>
+      </p:transition>
+    </mc:Choice>
+    <mc:Fallback>
+      <p:transition spd="slow">
+        <p:fade/>
+      </p:transition>
+    </mc:Fallback>
+  </mc:AlternateContent>
 </p:sld>
 </file>
 
@@ -10884,15 +10821,15 @@
       </p:grpSpPr>
       <p:pic>
         <p:nvPicPr>
-          <p:cNvPr id="2" name="Image 0" descr="https://kimi-img.moonshot.cn/pub/slides/okc/4p276auw2u64e/mnt/agents/output/llm_detection_review/images/2_Abstract_Neural_Network_Web_on_Dark.png">    </p:cNvPr>
+          <p:cNvPr id="2" name="Image 0" descr="https://kimi-img.moonshot.cn/pub/slides/okc/4p276auw2u64e/mnt/agents/output/llm_detection_review/images/2_Abstract_Neural_Network_Web_on_Dark.png"/>
           <p:cNvPicPr>
             <a:picLocks noChangeAspect="1"/>
           </p:cNvPicPr>
           <p:nvPr/>
         </p:nvPicPr>
         <p:blipFill>
-          <a:blip r:embed="rId1"/>
-          <a:srcRect l="0" r="0" t="21875" b="21875"/>
+          <a:blip r:embed="rId3"/>
+          <a:srcRect t="21875" b="21875"/>
           <a:stretch/>
         </p:blipFill>
         <p:spPr>
@@ -10919,7 +10856,7 @@
           <a:prstGeom prst="rect">
             <a:avLst/>
           </a:prstGeom>
-          <a:gradFill rotWithShape="1" flip="none">
+          <a:gradFill flip="none" rotWithShape="1">
             <a:gsLst>
               <a:gs pos="0">
                 <a:srgbClr val="080C17">
@@ -11163,10 +11100,18 @@
   <p:clrMapOvr>
     <a:masterClrMapping/>
   </p:clrMapOvr>
-  <p:transition>
-    <p:fade/>
-    <p:spd val="med"/>
-  </p:transition>
+  <mc:AlternateContent xmlns:mc="http://schemas.openxmlformats.org/markup-compatibility/2006">
+    <mc:Choice xmlns:p159="http://schemas.microsoft.com/office/powerpoint/2015/09/main" Requires="p159">
+      <p:transition spd="slow">
+        <p159:morph option="byObject"/>
+      </p:transition>
+    </mc:Choice>
+    <mc:Fallback>
+      <p:transition spd="slow">
+        <p:fade/>
+      </p:transition>
+    </mc:Fallback>
+  </mc:AlternateContent>
 </p:sld>
 </file>
 
@@ -11178,6 +11123,7 @@
         <a:solidFill>
           <a:srgbClr val="080C17"/>
         </a:solidFill>
+        <a:effectLst/>
       </p:bgPr>
     </p:bg>
     <p:spTree>
@@ -11241,7 +11187,7 @@
               </a:lnSpc>
             </a:pPr>
             <a:r>
-              <a:rPr lang="en-US" sz="1200" spc="100" kern="0" dirty="0">
+              <a:rPr lang="en-US" sz="1200" kern="0" spc="100" dirty="0">
                 <a:solidFill>
                   <a:srgbClr val="F1F5F9"/>
                 </a:solidFill>
@@ -11302,7 +11248,7 @@
               </a:lnSpc>
             </a:pPr>
             <a:r>
-              <a:rPr lang="en-US" sz="1200" spc="100" kern="0" dirty="0">
+              <a:rPr lang="en-US" sz="1200" kern="0" spc="100" dirty="0">
                 <a:solidFill>
                   <a:srgbClr val="94A3B8"/>
                 </a:solidFill>
@@ -11343,7 +11289,7 @@
               </a:lnSpc>
             </a:pPr>
             <a:r>
-              <a:rPr lang="en-US" sz="1200" spc="100" kern="0" dirty="0">
+              <a:rPr lang="en-US" sz="1200" kern="0" spc="100" dirty="0">
                 <a:solidFill>
                   <a:srgbClr val="94A3B8"/>
                 </a:solidFill>
@@ -11384,7 +11330,7 @@
               </a:lnSpc>
             </a:pPr>
             <a:r>
-              <a:rPr lang="en-US" sz="1200" spc="100" kern="0" dirty="0">
+              <a:rPr lang="en-US" sz="1200" kern="0" spc="100" dirty="0">
                 <a:solidFill>
                   <a:srgbClr val="94A3B8"/>
                 </a:solidFill>
@@ -11582,11 +11528,6 @@
               </a:rPr>
               <a:t>■</a:t>
             </a:r>
-            <a:pPr>
-              <a:lnSpc>
-                <a:spcPct val="160000"/>
-              </a:lnSpc>
-            </a:pPr>
             <a:r>
               <a:rPr lang="en-US" sz="1800" dirty="0">
                 <a:solidFill>
@@ -11620,6 +11561,20 @@
               </a:rPr>
               <a:t>■</a:t>
             </a:r>
+            <a:r>
+              <a:rPr lang="en-US" sz="1800" dirty="0">
+                <a:solidFill>
+                  <a:srgbClr val="F1F5F9"/>
+                </a:solidFill>
+                <a:latin typeface="QuattrocentoSans" pitchFamily="34" charset="0"/>
+                <a:ea typeface="QuattrocentoSans" pitchFamily="34" charset="-122"/>
+                <a:cs typeface="QuattrocentoSans" pitchFamily="34" charset="-120"/>
+              </a:rPr>
+              <a:t> Serious risks in academia, journalism, medicine, and law</a:t>
+            </a:r>
+            <a:endParaRPr lang="en-US" sz="1800" dirty="0"/>
+          </a:p>
+          <a:p>
             <a:pPr>
               <a:lnSpc>
                 <a:spcPct val="160000"/>
@@ -11631,13 +11586,24 @@
             <a:r>
               <a:rPr lang="en-US" sz="1800" dirty="0">
                 <a:solidFill>
-                  <a:srgbClr val="F1F5F9"/>
+                  <a:srgbClr val="00D9C0"/>
                 </a:solidFill>
                 <a:latin typeface="QuattrocentoSans" pitchFamily="34" charset="0"/>
                 <a:ea typeface="QuattrocentoSans" pitchFamily="34" charset="-122"/>
                 <a:cs typeface="QuattrocentoSans" pitchFamily="34" charset="-120"/>
               </a:rPr>
-              <a:t> Serious risks in academia, journalism, medicine, and law</a:t>
+              <a:t>■</a:t>
+            </a:r>
+            <a:r>
+              <a:rPr lang="en-US" sz="1800" dirty="0">
+                <a:solidFill>
+                  <a:srgbClr val="F1F5F9"/>
+                </a:solidFill>
+                <a:latin typeface="QuattrocentoSans" pitchFamily="34" charset="0"/>
+                <a:ea typeface="QuattrocentoSans" pitchFamily="34" charset="-122"/>
+                <a:cs typeface="QuattrocentoSans" pitchFamily="34" charset="-120"/>
+              </a:rPr>
+              <a:t> Early systems used perplexity scores &amp; stylometric indices</a:t>
             </a:r>
             <a:endParaRPr lang="en-US" sz="1800" dirty="0"/>
           </a:p>
@@ -11661,6 +11627,20 @@
               </a:rPr>
               <a:t>■</a:t>
             </a:r>
+            <a:r>
+              <a:rPr lang="en-US" sz="1800" dirty="0">
+                <a:solidFill>
+                  <a:srgbClr val="F1F5F9"/>
+                </a:solidFill>
+                <a:latin typeface="QuattrocentoSans" pitchFamily="34" charset="0"/>
+                <a:ea typeface="QuattrocentoSans" pitchFamily="34" charset="-122"/>
+                <a:cs typeface="QuattrocentoSans" pitchFamily="34" charset="-120"/>
+              </a:rPr>
+              <a:t> Transformers (RoBERTa, DistilBERT) achieve high accuracy but opaque decisions</a:t>
+            </a:r>
+            <a:endParaRPr lang="en-US" sz="1800" dirty="0"/>
+          </a:p>
+          <a:p>
             <a:pPr>
               <a:lnSpc>
                 <a:spcPct val="160000"/>
@@ -11672,13 +11652,24 @@
             <a:r>
               <a:rPr lang="en-US" sz="1800" dirty="0">
                 <a:solidFill>
-                  <a:srgbClr val="F1F5F9"/>
+                  <a:srgbClr val="00D9C0"/>
                 </a:solidFill>
                 <a:latin typeface="QuattrocentoSans" pitchFamily="34" charset="0"/>
                 <a:ea typeface="QuattrocentoSans" pitchFamily="34" charset="-122"/>
                 <a:cs typeface="QuattrocentoSans" pitchFamily="34" charset="-120"/>
               </a:rPr>
-              <a:t> Early systems used perplexity scores &amp; stylometric indices</a:t>
+              <a:t>■</a:t>
+            </a:r>
+            <a:r>
+              <a:rPr lang="en-US" sz="1800" dirty="0">
+                <a:solidFill>
+                  <a:srgbClr val="F1F5F9"/>
+                </a:solidFill>
+                <a:latin typeface="QuattrocentoSans" pitchFamily="34" charset="0"/>
+                <a:ea typeface="QuattrocentoSans" pitchFamily="34" charset="-122"/>
+                <a:cs typeface="QuattrocentoSans" pitchFamily="34" charset="-120"/>
+              </a:rPr>
+              <a:t> Black-box decisions cannot support institutional accountability</a:t>
             </a:r>
             <a:endParaRPr lang="en-US" sz="1800" dirty="0"/>
           </a:p>
@@ -11702,14 +11693,6 @@
               </a:rPr>
               <a:t>■</a:t>
             </a:r>
-            <a:pPr>
-              <a:lnSpc>
-                <a:spcPct val="160000"/>
-              </a:lnSpc>
-              <a:spcBef>
-                <a:spcPts val="1400"/>
-              </a:spcBef>
-            </a:pPr>
             <a:r>
               <a:rPr lang="en-US" sz="1800" dirty="0">
                 <a:solidFill>
@@ -11719,98 +11702,8 @@
                 <a:ea typeface="QuattrocentoSans" pitchFamily="34" charset="-122"/>
                 <a:cs typeface="QuattrocentoSans" pitchFamily="34" charset="-120"/>
               </a:rPr>
-              <a:t> Transformers (RoBERTa, DistilBERT) achieve high accuracy but opaque decisions</a:t>
-            </a:r>
-            <a:endParaRPr lang="en-US" sz="1800" dirty="0"/>
-          </a:p>
-          <a:p>
-            <a:pPr>
-              <a:lnSpc>
-                <a:spcPct val="160000"/>
-              </a:lnSpc>
-              <a:spcBef>
-                <a:spcPts val="1400"/>
-              </a:spcBef>
-            </a:pPr>
-            <a:r>
-              <a:rPr lang="en-US" sz="1800" dirty="0">
-                <a:solidFill>
-                  <a:srgbClr val="00D9C0"/>
-                </a:solidFill>
-                <a:latin typeface="QuattrocentoSans" pitchFamily="34" charset="0"/>
-                <a:ea typeface="QuattrocentoSans" pitchFamily="34" charset="-122"/>
-                <a:cs typeface="QuattrocentoSans" pitchFamily="34" charset="-120"/>
-              </a:rPr>
-              <a:t>■</a:t>
-            </a:r>
-            <a:pPr>
-              <a:lnSpc>
-                <a:spcPct val="160000"/>
-              </a:lnSpc>
-              <a:spcBef>
-                <a:spcPts val="1400"/>
-              </a:spcBef>
-            </a:pPr>
-            <a:r>
-              <a:rPr lang="en-US" sz="1800" dirty="0">
-                <a:solidFill>
-                  <a:srgbClr val="F1F5F9"/>
-                </a:solidFill>
-                <a:latin typeface="QuattrocentoSans" pitchFamily="34" charset="0"/>
-                <a:ea typeface="QuattrocentoSans" pitchFamily="34" charset="-122"/>
-                <a:cs typeface="QuattrocentoSans" pitchFamily="34" charset="-120"/>
-              </a:rPr>
-              <a:t> Black-box decisions cannot support institutional accountability</a:t>
-            </a:r>
-            <a:endParaRPr lang="en-US" sz="1800" dirty="0"/>
-          </a:p>
-          <a:p>
-            <a:pPr>
-              <a:lnSpc>
-                <a:spcPct val="160000"/>
-              </a:lnSpc>
-              <a:spcBef>
-                <a:spcPts val="1400"/>
-              </a:spcBef>
-            </a:pPr>
-            <a:r>
-              <a:rPr lang="en-US" sz="1800" dirty="0">
-                <a:solidFill>
-                  <a:srgbClr val="00D9C0"/>
-                </a:solidFill>
-                <a:latin typeface="QuattrocentoSans" pitchFamily="34" charset="0"/>
-                <a:ea typeface="QuattrocentoSans" pitchFamily="34" charset="-122"/>
-                <a:cs typeface="QuattrocentoSans" pitchFamily="34" charset="-120"/>
-              </a:rPr>
-              <a:t>■</a:t>
-            </a:r>
-            <a:pPr>
-              <a:lnSpc>
-                <a:spcPct val="160000"/>
-              </a:lnSpc>
-              <a:spcBef>
-                <a:spcPts val="1400"/>
-              </a:spcBef>
-            </a:pPr>
-            <a:r>
-              <a:rPr lang="en-US" sz="1800" dirty="0">
-                <a:solidFill>
-                  <a:srgbClr val="F1F5F9"/>
-                </a:solidFill>
-                <a:latin typeface="QuattrocentoSans" pitchFamily="34" charset="0"/>
-                <a:ea typeface="QuattrocentoSans" pitchFamily="34" charset="-122"/>
-                <a:cs typeface="QuattrocentoSans" pitchFamily="34" charset="-120"/>
-              </a:rPr>
               <a:t> </a:t>
             </a:r>
-            <a:pPr>
-              <a:lnSpc>
-                <a:spcPct val="160000"/>
-              </a:lnSpc>
-              <a:spcBef>
-                <a:spcPts val="1400"/>
-              </a:spcBef>
-            </a:pPr>
             <a:r>
               <a:rPr lang="en-US" sz="1800" b="1" dirty="0">
                 <a:solidFill>
@@ -12316,10 +12209,18 @@
   <p:clrMapOvr>
     <a:masterClrMapping/>
   </p:clrMapOvr>
-  <p:transition>
-    <p:fade/>
-    <p:spd val="med"/>
-  </p:transition>
+  <mc:AlternateContent xmlns:mc="http://schemas.openxmlformats.org/markup-compatibility/2006">
+    <mc:Choice xmlns:p159="http://schemas.microsoft.com/office/powerpoint/2015/09/main" Requires="p159">
+      <p:transition spd="slow">
+        <p159:morph option="byObject"/>
+      </p:transition>
+    </mc:Choice>
+    <mc:Fallback>
+      <p:transition spd="slow">
+        <p:fade/>
+      </p:transition>
+    </mc:Fallback>
+  </mc:AlternateContent>
 </p:sld>
 </file>
 
@@ -12331,6 +12232,7 @@
         <a:solidFill>
           <a:srgbClr val="080C17"/>
         </a:solidFill>
+        <a:effectLst/>
       </p:bgPr>
     </p:bg>
     <p:spTree>
@@ -12394,7 +12296,7 @@
               </a:lnSpc>
             </a:pPr>
             <a:r>
-              <a:rPr lang="en-US" sz="1200" spc="100" kern="0" dirty="0">
+              <a:rPr lang="en-US" sz="1200" kern="0" spc="100" dirty="0">
                 <a:solidFill>
                   <a:srgbClr val="F1F5F9"/>
                 </a:solidFill>
@@ -12455,7 +12357,7 @@
               </a:lnSpc>
             </a:pPr>
             <a:r>
-              <a:rPr lang="en-US" sz="1200" spc="100" kern="0" dirty="0">
+              <a:rPr lang="en-US" sz="1200" kern="0" spc="100" dirty="0">
                 <a:solidFill>
                   <a:srgbClr val="94A3B8"/>
                 </a:solidFill>
@@ -12496,7 +12398,7 @@
               </a:lnSpc>
             </a:pPr>
             <a:r>
-              <a:rPr lang="en-US" sz="1200" spc="100" kern="0" dirty="0">
+              <a:rPr lang="en-US" sz="1200" kern="0" spc="100" dirty="0">
                 <a:solidFill>
                   <a:srgbClr val="94A3B8"/>
                 </a:solidFill>
@@ -12537,7 +12439,7 @@
               </a:lnSpc>
             </a:pPr>
             <a:r>
-              <a:rPr lang="en-US" sz="1200" spc="100" kern="0" dirty="0">
+              <a:rPr lang="en-US" sz="1200" kern="0" spc="100" dirty="0">
                 <a:solidFill>
                   <a:srgbClr val="94A3B8"/>
                 </a:solidFill>
@@ -13130,11 +13032,6 @@
               </a:rPr>
               <a:t>Fast, flexible</a:t>
             </a:r>
-            <a:pPr>
-              <a:lnSpc>
-                <a:spcPct val="150000"/>
-              </a:lnSpc>
-            </a:pPr>
             <a:r>
               <a:rPr lang="en-US" sz="1400" dirty="0">
                 <a:solidFill>
@@ -13146,11 +13043,6 @@
               </a:rPr>
               <a:t> | </a:t>
             </a:r>
-            <a:pPr>
-              <a:lnSpc>
-                <a:spcPct val="150000"/>
-              </a:lnSpc>
-            </a:pPr>
             <a:r>
               <a:rPr lang="en-US" sz="1400" dirty="0">
                 <a:solidFill>
@@ -13308,11 +13200,6 @@
               </a:rPr>
               <a:t>Consistent &amp; reproducible</a:t>
             </a:r>
-            <a:pPr>
-              <a:lnSpc>
-                <a:spcPct val="150000"/>
-              </a:lnSpc>
-            </a:pPr>
             <a:r>
               <a:rPr lang="en-US" sz="1400" dirty="0">
                 <a:solidFill>
@@ -13324,11 +13211,6 @@
               </a:rPr>
               <a:t> | </a:t>
             </a:r>
-            <a:pPr>
-              <a:lnSpc>
-                <a:spcPct val="150000"/>
-              </a:lnSpc>
-            </a:pPr>
             <a:r>
               <a:rPr lang="en-US" sz="1400" dirty="0">
                 <a:solidFill>
@@ -13812,10 +13694,18 @@
   <p:clrMapOvr>
     <a:masterClrMapping/>
   </p:clrMapOvr>
-  <p:transition>
-    <p:fade/>
-    <p:spd val="med"/>
-  </p:transition>
+  <mc:AlternateContent xmlns:mc="http://schemas.openxmlformats.org/markup-compatibility/2006">
+    <mc:Choice xmlns:p159="http://schemas.microsoft.com/office/powerpoint/2015/09/main" Requires="p159">
+      <p:transition spd="slow">
+        <p159:morph option="byObject"/>
+      </p:transition>
+    </mc:Choice>
+    <mc:Fallback>
+      <p:transition spd="slow">
+        <p:fade/>
+      </p:transition>
+    </mc:Fallback>
+  </mc:AlternateContent>
 </p:sld>
 </file>
 
@@ -13838,15 +13728,15 @@
       </p:grpSpPr>
       <p:pic>
         <p:nvPicPr>
-          <p:cNvPr id="2" name="Image 0" descr="https://kimi-img.moonshot.cn/pub/slides/okc/4p276auw2u64e/mnt/agents/output/llm_detection_review/images/9_Neural_Network_Big_Data_Flow_Visualizatio.png">    </p:cNvPr>
+          <p:cNvPr id="2" name="Image 0" descr="https://kimi-img.moonshot.cn/pub/slides/okc/4p276auw2u64e/mnt/agents/output/llm_detection_review/images/9_Neural_Network_Big_Data_Flow_Visualizatio.png"/>
           <p:cNvPicPr>
             <a:picLocks noChangeAspect="1"/>
           </p:cNvPicPr>
           <p:nvPr/>
         </p:nvPicPr>
         <p:blipFill>
-          <a:blip r:embed="rId1"/>
-          <a:srcRect l="0" r="0" t="0" b="0"/>
+          <a:blip r:embed="rId3"/>
+          <a:srcRect/>
           <a:stretch/>
         </p:blipFill>
         <p:spPr>
@@ -13873,7 +13763,7 @@
           <a:prstGeom prst="rect">
             <a:avLst/>
           </a:prstGeom>
-          <a:gradFill rotWithShape="1" flip="none">
+          <a:gradFill flip="none" rotWithShape="1">
             <a:gsLst>
               <a:gs pos="0">
                 <a:srgbClr val="080C17">
@@ -14117,10 +14007,18 @@
   <p:clrMapOvr>
     <a:masterClrMapping/>
   </p:clrMapOvr>
-  <p:transition>
-    <p:fade/>
-    <p:spd val="med"/>
-  </p:transition>
+  <mc:AlternateContent xmlns:mc="http://schemas.openxmlformats.org/markup-compatibility/2006">
+    <mc:Choice xmlns:p159="http://schemas.microsoft.com/office/powerpoint/2015/09/main" Requires="p159">
+      <p:transition spd="slow">
+        <p159:morph option="byObject"/>
+      </p:transition>
+    </mc:Choice>
+    <mc:Fallback>
+      <p:transition spd="slow">
+        <p:fade/>
+      </p:transition>
+    </mc:Fallback>
+  </mc:AlternateContent>
 </p:sld>
 </file>
 
@@ -14132,6 +14030,7 @@
         <a:solidFill>
           <a:srgbClr val="080C17"/>
         </a:solidFill>
+        <a:effectLst/>
       </p:bgPr>
     </p:bg>
     <p:spTree>
@@ -14195,7 +14094,7 @@
               </a:lnSpc>
             </a:pPr>
             <a:r>
-              <a:rPr lang="en-US" sz="1200" spc="100" kern="0" dirty="0">
+              <a:rPr lang="en-US" sz="1200" kern="0" spc="100" dirty="0">
                 <a:solidFill>
                   <a:srgbClr val="94A3B8"/>
                 </a:solidFill>
@@ -14236,7 +14135,7 @@
               </a:lnSpc>
             </a:pPr>
             <a:r>
-              <a:rPr lang="en-US" sz="1200" spc="100" kern="0" dirty="0">
+              <a:rPr lang="en-US" sz="1200" kern="0" spc="100" dirty="0">
                 <a:solidFill>
                   <a:srgbClr val="F1F5F9"/>
                 </a:solidFill>
@@ -14297,7 +14196,7 @@
               </a:lnSpc>
             </a:pPr>
             <a:r>
-              <a:rPr lang="en-US" sz="1200" spc="100" kern="0" dirty="0">
+              <a:rPr lang="en-US" sz="1200" kern="0" spc="100" dirty="0">
                 <a:solidFill>
                   <a:srgbClr val="94A3B8"/>
                 </a:solidFill>
@@ -14338,7 +14237,7 @@
               </a:lnSpc>
             </a:pPr>
             <a:r>
-              <a:rPr lang="en-US" sz="1200" spc="100" kern="0" dirty="0">
+              <a:rPr lang="en-US" sz="1200" kern="0" spc="100" dirty="0">
                 <a:solidFill>
                   <a:srgbClr val="94A3B8"/>
                 </a:solidFill>
@@ -14978,11 +14877,6 @@
               </a:rPr>
               <a:t>12 studies included</a:t>
             </a:r>
-            <a:pPr>
-              <a:lnSpc>
-                <a:spcPct val="150000"/>
-              </a:lnSpc>
-            </a:pPr>
             <a:r>
               <a:rPr lang="en-US" sz="1600" dirty="0">
                 <a:solidFill>
@@ -15140,11 +15034,6 @@
               </a:rPr>
               <a:t>■</a:t>
             </a:r>
-            <a:pPr>
-              <a:lnSpc>
-                <a:spcPct val="160000"/>
-              </a:lnSpc>
-            </a:pPr>
             <a:r>
               <a:rPr lang="en-US" sz="1600" dirty="0">
                 <a:solidFill>
@@ -15175,11 +15064,6 @@
               </a:rPr>
               <a:t>■</a:t>
             </a:r>
-            <a:pPr>
-              <a:lnSpc>
-                <a:spcPct val="160000"/>
-              </a:lnSpc>
-            </a:pPr>
             <a:r>
               <a:rPr lang="en-US" sz="1600" dirty="0">
                 <a:solidFill>
@@ -15210,11 +15094,6 @@
               </a:rPr>
               <a:t>■</a:t>
             </a:r>
-            <a:pPr>
-              <a:lnSpc>
-                <a:spcPct val="160000"/>
-              </a:lnSpc>
-            </a:pPr>
             <a:r>
               <a:rPr lang="en-US" sz="1600" dirty="0">
                 <a:solidFill>
@@ -15245,11 +15124,6 @@
               </a:rPr>
               <a:t>■</a:t>
             </a:r>
-            <a:pPr>
-              <a:lnSpc>
-                <a:spcPct val="160000"/>
-              </a:lnSpc>
-            </a:pPr>
             <a:r>
               <a:rPr lang="en-US" sz="1600" dirty="0">
                 <a:solidFill>
@@ -15280,11 +15154,6 @@
               </a:rPr>
               <a:t>■</a:t>
             </a:r>
-            <a:pPr>
-              <a:lnSpc>
-                <a:spcPct val="160000"/>
-              </a:lnSpc>
-            </a:pPr>
             <a:r>
               <a:rPr lang="en-US" sz="1600" dirty="0">
                 <a:solidFill>
@@ -15315,11 +15184,6 @@
               </a:rPr>
               <a:t>■</a:t>
             </a:r>
-            <a:pPr>
-              <a:lnSpc>
-                <a:spcPct val="160000"/>
-              </a:lnSpc>
-            </a:pPr>
             <a:r>
               <a:rPr lang="en-US" sz="1600" dirty="0">
                 <a:solidFill>
@@ -15447,10 +15311,18 @@
   <p:clrMapOvr>
     <a:masterClrMapping/>
   </p:clrMapOvr>
-  <p:transition>
-    <p:fade/>
-    <p:spd val="med"/>
-  </p:transition>
+  <mc:AlternateContent xmlns:mc="http://schemas.openxmlformats.org/markup-compatibility/2006">
+    <mc:Choice xmlns:p159="http://schemas.microsoft.com/office/powerpoint/2015/09/main" Requires="p159">
+      <p:transition spd="slow">
+        <p159:morph option="byObject"/>
+      </p:transition>
+    </mc:Choice>
+    <mc:Fallback>
+      <p:transition spd="slow">
+        <p:fade/>
+      </p:transition>
+    </mc:Fallback>
+  </mc:AlternateContent>
 </p:sld>
 </file>
 
@@ -15473,15 +15345,15 @@
       </p:grpSpPr>
       <p:pic>
         <p:nvPicPr>
-          <p:cNvPr id="2" name="Image 0" descr="https://kimi-img.moonshot.cn/pub/slides/okc/4p276auw2u64e/mnt/agents/output/llm_detection_review/images/10_Abstract_Ai_Neural_Network_Concept.png">    </p:cNvPr>
+          <p:cNvPr id="2" name="Image 0" descr="https://kimi-img.moonshot.cn/pub/slides/okc/4p276auw2u64e/mnt/agents/output/llm_detection_review/images/10_Abstract_Ai_Neural_Network_Concept.png"/>
           <p:cNvPicPr>
             <a:picLocks noChangeAspect="1"/>
           </p:cNvPicPr>
           <p:nvPr/>
         </p:nvPicPr>
         <p:blipFill>
-          <a:blip r:embed="rId1"/>
-          <a:srcRect l="0" r="0" t="0" b="0"/>
+          <a:blip r:embed="rId3"/>
+          <a:srcRect/>
           <a:stretch/>
         </p:blipFill>
         <p:spPr>
@@ -15508,7 +15380,7 @@
           <a:prstGeom prst="rect">
             <a:avLst/>
           </a:prstGeom>
-          <a:gradFill rotWithShape="1" flip="none">
+          <a:gradFill flip="none" rotWithShape="1">
             <a:gsLst>
               <a:gs pos="0">
                 <a:srgbClr val="080C17">
@@ -15752,10 +15624,18 @@
   <p:clrMapOvr>
     <a:masterClrMapping/>
   </p:clrMapOvr>
-  <p:transition>
-    <p:fade/>
-    <p:spd val="med"/>
-  </p:transition>
+  <mc:AlternateContent xmlns:mc="http://schemas.openxmlformats.org/markup-compatibility/2006">
+    <mc:Choice xmlns:p159="http://schemas.microsoft.com/office/powerpoint/2015/09/main" Requires="p159">
+      <p:transition spd="slow">
+        <p159:morph option="byObject"/>
+      </p:transition>
+    </mc:Choice>
+    <mc:Fallback>
+      <p:transition spd="slow">
+        <p:fade/>
+      </p:transition>
+    </mc:Fallback>
+  </mc:AlternateContent>
 </p:sld>
 </file>
 
@@ -15767,6 +15647,7 @@
         <a:solidFill>
           <a:srgbClr val="080C17"/>
         </a:solidFill>
+        <a:effectLst/>
       </p:bgPr>
     </p:bg>
     <p:spTree>
@@ -15830,7 +15711,7 @@
               </a:lnSpc>
             </a:pPr>
             <a:r>
-              <a:rPr lang="en-US" sz="1200" spc="100" kern="0" dirty="0">
+              <a:rPr lang="en-US" sz="1200" kern="0" spc="100" dirty="0">
                 <a:solidFill>
                   <a:srgbClr val="94A3B8"/>
                 </a:solidFill>
@@ -15871,7 +15752,7 @@
               </a:lnSpc>
             </a:pPr>
             <a:r>
-              <a:rPr lang="en-US" sz="1200" spc="100" kern="0" dirty="0">
+              <a:rPr lang="en-US" sz="1200" kern="0" spc="100" dirty="0">
                 <a:solidFill>
                   <a:srgbClr val="94A3B8"/>
                 </a:solidFill>
@@ -15912,7 +15793,7 @@
               </a:lnSpc>
             </a:pPr>
             <a:r>
-              <a:rPr lang="en-US" sz="1200" spc="100" kern="0" dirty="0">
+              <a:rPr lang="en-US" sz="1200" kern="0" spc="100" dirty="0">
                 <a:solidFill>
                   <a:srgbClr val="F1F5F9"/>
                 </a:solidFill>
@@ -15973,7 +15854,7 @@
               </a:lnSpc>
             </a:pPr>
             <a:r>
-              <a:rPr lang="en-US" sz="1200" spc="100" kern="0" dirty="0">
+              <a:rPr lang="en-US" sz="1200" kern="0" spc="100" dirty="0">
                 <a:solidFill>
                   <a:srgbClr val="94A3B8"/>
                 </a:solidFill>
@@ -16937,11 +16818,6 @@
               </a:rPr>
               <a:t>■</a:t>
             </a:r>
-            <a:pPr>
-              <a:lnSpc>
-                <a:spcPct val="100000"/>
-              </a:lnSpc>
-            </a:pPr>
             <a:r>
               <a:rPr lang="en-US" sz="1500" dirty="0">
                 <a:solidFill>
@@ -16953,11 +16829,6 @@
               </a:rPr>
               <a:t> </a:t>
             </a:r>
-            <a:pPr>
-              <a:lnSpc>
-                <a:spcPct val="100000"/>
-              </a:lnSpc>
-            </a:pPr>
             <a:r>
               <a:rPr lang="en-US" sz="1500" b="1" dirty="0">
                 <a:solidFill>
@@ -16969,11 +16840,6 @@
               </a:rPr>
               <a:t>Shared finding:</a:t>
             </a:r>
-            <a:pPr>
-              <a:lnSpc>
-                <a:spcPct val="100000"/>
-              </a:lnSpc>
-            </a:pPr>
             <a:r>
               <a:rPr lang="en-US" sz="1500" dirty="0">
                 <a:solidFill>
@@ -17035,10 +16901,18 @@
   <p:clrMapOvr>
     <a:masterClrMapping/>
   </p:clrMapOvr>
-  <p:transition>
-    <p:fade/>
-    <p:spd val="med"/>
-  </p:transition>
+  <mc:AlternateContent xmlns:mc="http://schemas.openxmlformats.org/markup-compatibility/2006">
+    <mc:Choice xmlns:p159="http://schemas.microsoft.com/office/powerpoint/2015/09/main" Requires="p159">
+      <p:transition spd="slow">
+        <p159:morph option="byObject"/>
+      </p:transition>
+    </mc:Choice>
+    <mc:Fallback>
+      <p:transition spd="slow">
+        <p:fade/>
+      </p:transition>
+    </mc:Fallback>
+  </mc:AlternateContent>
 </p:sld>
 </file>
 
@@ -17050,31 +16924,326 @@
         <a:srgbClr val="000000"/>
       </a:dk1>
       <a:lt1>
-        <a:srgbClr val="ffffff"/>
+        <a:srgbClr val="FFFFFF"/>
       </a:lt1>
       <a:dk2>
         <a:srgbClr val="333333"/>
       </a:dk2>
       <a:lt2>
-        <a:srgbClr val="eeeeee"/>
+        <a:srgbClr val="EEEEEE"/>
       </a:lt2>
       <a:accent1>
-        <a:srgbClr val="8daac2"/>
+        <a:srgbClr val="8DAAC2"/>
       </a:accent1>
       <a:accent2>
-        <a:srgbClr val="ed7d31"/>
+        <a:srgbClr val="ED7D31"/>
       </a:accent2>
       <a:accent3>
-        <a:srgbClr val="a5a5a5"/>
+        <a:srgbClr val="A5A5A5"/>
       </a:accent3>
       <a:accent4>
-        <a:srgbClr val="ffc000"/>
+        <a:srgbClr val="FFC000"/>
       </a:accent4>
       <a:accent5>
-        <a:srgbClr val="4472c4"/>
+        <a:srgbClr val="4472C4"/>
       </a:accent5>
       <a:accent6>
-        <a:srgbClr val="70ad47"/>
+        <a:srgbClr val="70AD47"/>
+      </a:accent6>
+      <a:hlink>
+        <a:srgbClr val="0563C1"/>
+      </a:hlink>
+      <a:folHlink>
+        <a:srgbClr val="954F72"/>
+      </a:folHlink>
+    </a:clrScheme>
+    <a:fontScheme name="Office">
+      <a:majorFont>
+        <a:latin typeface="Calibri Light" panose="020F0302020204030204"/>
+        <a:ea typeface=""/>
+        <a:cs typeface=""/>
+        <a:font script="Jpan" typeface="游ゴシック Light"/>
+        <a:font script="Hang" typeface="맑은 고딕"/>
+        <a:font script="Hans" typeface="等线 Light"/>
+        <a:font script="Hant" typeface="新細明體"/>
+        <a:font script="Arab" typeface="Times New Roman"/>
+        <a:font script="Hebr" typeface="Times New Roman"/>
+        <a:font script="Thai" typeface="Angsana New"/>
+        <a:font script="Ethi" typeface="Nyala"/>
+        <a:font script="Beng" typeface="Vrinda"/>
+        <a:font script="Gujr" typeface="Shruti"/>
+        <a:font script="Khmr" typeface="MoolBoran"/>
+        <a:font script="Knda" typeface="Tunga"/>
+        <a:font script="Guru" typeface="Raavi"/>
+        <a:font script="Cans" typeface="Euphemia"/>
+        <a:font script="Cher" typeface="Plantagenet Cherokee"/>
+        <a:font script="Yiii" typeface="Microsoft Yi Baiti"/>
+        <a:font script="Tibt" typeface="Microsoft Himalaya"/>
+        <a:font script="Thaa" typeface="MV Boli"/>
+        <a:font script="Deva" typeface="Mangal"/>
+        <a:font script="Telu" typeface="Gautami"/>
+        <a:font script="Taml" typeface="Latha"/>
+        <a:font script="Syrc" typeface="Estrangelo Edessa"/>
+        <a:font script="Orya" typeface="Kalinga"/>
+        <a:font script="Mlym" typeface="Kartika"/>
+        <a:font script="Laoo" typeface="DokChampa"/>
+        <a:font script="Sinh" typeface="Iskoola Pota"/>
+        <a:font script="Mong" typeface="Mongolian Baiti"/>
+        <a:font script="Viet" typeface="Times New Roman"/>
+        <a:font script="Uigh" typeface="Microsoft Uighur"/>
+        <a:font script="Geor" typeface="Sylfaen"/>
+        <a:font script="Armn" typeface="Arial"/>
+        <a:font script="Bugi" typeface="Leelawadee UI"/>
+        <a:font script="Bopo" typeface="Microsoft JhengHei"/>
+        <a:font script="Java" typeface="Javanese Text"/>
+        <a:font script="Lisu" typeface="Segoe UI"/>
+        <a:font script="Mymr" typeface="Myanmar Text"/>
+        <a:font script="Nkoo" typeface="Ebrima"/>
+        <a:font script="Olck" typeface="Nirmala UI"/>
+        <a:font script="Osma" typeface="Ebrima"/>
+        <a:font script="Phag" typeface="Phagspa"/>
+        <a:font script="Syrn" typeface="Estrangelo Edessa"/>
+        <a:font script="Syrj" typeface="Estrangelo Edessa"/>
+        <a:font script="Syre" typeface="Estrangelo Edessa"/>
+        <a:font script="Sora" typeface="Nirmala UI"/>
+        <a:font script="Tale" typeface="Microsoft Tai Le"/>
+        <a:font script="Talu" typeface="Microsoft New Tai Lue"/>
+        <a:font script="Tfng" typeface="Ebrima"/>
+      </a:majorFont>
+      <a:minorFont>
+        <a:latin typeface="Calibri" panose="020F0502020204030204"/>
+        <a:ea typeface=""/>
+        <a:cs typeface=""/>
+        <a:font script="Jpan" typeface="游ゴシック"/>
+        <a:font script="Hang" typeface="맑은 고딕"/>
+        <a:font script="Hans" typeface="等线"/>
+        <a:font script="Hant" typeface="新細明體"/>
+        <a:font script="Arab" typeface="Arial"/>
+        <a:font script="Hebr" typeface="Arial"/>
+        <a:font script="Thai" typeface="Cordia New"/>
+        <a:font script="Ethi" typeface="Nyala"/>
+        <a:font script="Beng" typeface="Vrinda"/>
+        <a:font script="Gujr" typeface="Shruti"/>
+        <a:font script="Khmr" typeface="DaunPenh"/>
+        <a:font script="Knda" typeface="Tunga"/>
+        <a:font script="Guru" typeface="Raavi"/>
+        <a:font script="Cans" typeface="Euphemia"/>
+        <a:font script="Cher" typeface="Plantagenet Cherokee"/>
+        <a:font script="Yiii" typeface="Microsoft Yi Baiti"/>
+        <a:font script="Tibt" typeface="Microsoft Himalaya"/>
+        <a:font script="Thaa" typeface="MV Boli"/>
+        <a:font script="Deva" typeface="Mangal"/>
+        <a:font script="Telu" typeface="Gautami"/>
+        <a:font script="Taml" typeface="Latha"/>
+        <a:font script="Syrc" typeface="Estrangelo Edessa"/>
+        <a:font script="Orya" typeface="Kalinga"/>
+        <a:font script="Mlym" typeface="Kartika"/>
+        <a:font script="Laoo" typeface="DokChampa"/>
+        <a:font script="Sinh" typeface="Iskoola Pota"/>
+        <a:font script="Mong" typeface="Mongolian Baiti"/>
+        <a:font script="Viet" typeface="Arial"/>
+        <a:font script="Uigh" typeface="Microsoft Uighur"/>
+        <a:font script="Geor" typeface="Sylfaen"/>
+        <a:font script="Armn" typeface="Arial"/>
+        <a:font script="Bugi" typeface="Leelawadee UI"/>
+        <a:font script="Bopo" typeface="Microsoft JhengHei"/>
+        <a:font script="Java" typeface="Javanese Text"/>
+        <a:font script="Lisu" typeface="Segoe UI"/>
+        <a:font script="Mymr" typeface="Myanmar Text"/>
+        <a:font script="Nkoo" typeface="Ebrima"/>
+        <a:font script="Olck" typeface="Nirmala UI"/>
+        <a:font script="Osma" typeface="Ebrima"/>
+        <a:font script="Phag" typeface="Phagspa"/>
+        <a:font script="Syrn" typeface="Estrangelo Edessa"/>
+        <a:font script="Syrj" typeface="Estrangelo Edessa"/>
+        <a:font script="Syre" typeface="Estrangelo Edessa"/>
+        <a:font script="Sora" typeface="Nirmala UI"/>
+        <a:font script="Tale" typeface="Microsoft Tai Le"/>
+        <a:font script="Talu" typeface="Microsoft New Tai Lue"/>
+        <a:font script="Tfng" typeface="Ebrima"/>
+      </a:minorFont>
+    </a:fontScheme>
+    <a:fmtScheme name="Office">
+      <a:fillStyleLst>
+        <a:solidFill>
+          <a:schemeClr val="phClr"/>
+        </a:solidFill>
+        <a:gradFill rotWithShape="1">
+          <a:gsLst>
+            <a:gs pos="0">
+              <a:schemeClr val="phClr">
+                <a:lumMod val="110000"/>
+                <a:satMod val="105000"/>
+                <a:tint val="67000"/>
+              </a:schemeClr>
+            </a:gs>
+            <a:gs pos="50000">
+              <a:schemeClr val="phClr">
+                <a:lumMod val="105000"/>
+                <a:satMod val="103000"/>
+                <a:tint val="73000"/>
+              </a:schemeClr>
+            </a:gs>
+            <a:gs pos="100000">
+              <a:schemeClr val="phClr">
+                <a:lumMod val="105000"/>
+                <a:satMod val="109000"/>
+                <a:tint val="81000"/>
+              </a:schemeClr>
+            </a:gs>
+          </a:gsLst>
+          <a:lin ang="5400000" scaled="0"/>
+        </a:gradFill>
+        <a:gradFill rotWithShape="1">
+          <a:gsLst>
+            <a:gs pos="0">
+              <a:schemeClr val="phClr">
+                <a:satMod val="103000"/>
+                <a:lumMod val="102000"/>
+                <a:tint val="94000"/>
+              </a:schemeClr>
+            </a:gs>
+            <a:gs pos="50000">
+              <a:schemeClr val="phClr">
+                <a:satMod val="110000"/>
+                <a:lumMod val="100000"/>
+                <a:shade val="100000"/>
+              </a:schemeClr>
+            </a:gs>
+            <a:gs pos="100000">
+              <a:schemeClr val="phClr">
+                <a:lumMod val="99000"/>
+                <a:satMod val="120000"/>
+                <a:shade val="78000"/>
+              </a:schemeClr>
+            </a:gs>
+          </a:gsLst>
+          <a:lin ang="5400000" scaled="0"/>
+        </a:gradFill>
+      </a:fillStyleLst>
+      <a:lnStyleLst>
+        <a:ln w="6350" cap="flat" cmpd="sng" algn="ctr">
+          <a:solidFill>
+            <a:schemeClr val="phClr"/>
+          </a:solidFill>
+          <a:prstDash val="solid"/>
+          <a:miter lim="800000"/>
+        </a:ln>
+        <a:ln w="12700" cap="flat" cmpd="sng" algn="ctr">
+          <a:solidFill>
+            <a:schemeClr val="phClr"/>
+          </a:solidFill>
+          <a:prstDash val="solid"/>
+          <a:miter lim="800000"/>
+        </a:ln>
+        <a:ln w="19050" cap="flat" cmpd="sng" algn="ctr">
+          <a:solidFill>
+            <a:schemeClr val="phClr"/>
+          </a:solidFill>
+          <a:prstDash val="solid"/>
+          <a:miter lim="800000"/>
+        </a:ln>
+      </a:lnStyleLst>
+      <a:effectStyleLst>
+        <a:effectStyle>
+          <a:effectLst/>
+        </a:effectStyle>
+        <a:effectStyle>
+          <a:effectLst/>
+        </a:effectStyle>
+        <a:effectStyle>
+          <a:effectLst>
+            <a:outerShdw blurRad="57150" dist="19050" dir="5400000" algn="ctr" rotWithShape="0">
+              <a:srgbClr val="000000">
+                <a:alpha val="63000"/>
+              </a:srgbClr>
+            </a:outerShdw>
+          </a:effectLst>
+        </a:effectStyle>
+      </a:effectStyleLst>
+      <a:bgFillStyleLst>
+        <a:solidFill>
+          <a:schemeClr val="phClr"/>
+        </a:solidFill>
+        <a:solidFill>
+          <a:schemeClr val="phClr">
+            <a:tint val="95000"/>
+            <a:satMod val="170000"/>
+          </a:schemeClr>
+        </a:solidFill>
+        <a:gradFill rotWithShape="1">
+          <a:gsLst>
+            <a:gs pos="0">
+              <a:schemeClr val="phClr">
+                <a:tint val="93000"/>
+                <a:satMod val="150000"/>
+                <a:shade val="98000"/>
+                <a:lumMod val="102000"/>
+              </a:schemeClr>
+            </a:gs>
+            <a:gs pos="50000">
+              <a:schemeClr val="phClr">
+                <a:tint val="98000"/>
+                <a:satMod val="130000"/>
+                <a:shade val="90000"/>
+                <a:lumMod val="103000"/>
+              </a:schemeClr>
+            </a:gs>
+            <a:gs pos="100000">
+              <a:schemeClr val="phClr">
+                <a:shade val="63000"/>
+                <a:satMod val="120000"/>
+              </a:schemeClr>
+            </a:gs>
+          </a:gsLst>
+          <a:lin ang="5400000" scaled="0"/>
+        </a:gradFill>
+      </a:bgFillStyleLst>
+    </a:fmtScheme>
+  </a:themeElements>
+  <a:objectDefaults/>
+  <a:extraClrSchemeLst/>
+  <a:extLst>
+    <a:ext uri="{05A4C25C-085E-4340-85A3-A5531E510DB2}">
+      <thm15:themeFamily xmlns:thm15="http://schemas.microsoft.com/office/thememl/2012/main" name="Office Theme" id="{62F939B6-93AF-4DB8-9C6B-D6C7DFDC589F}" vid="{4A3C46E8-61CC-4603-A589-7422A47A8E4A}"/>
+    </a:ext>
+  </a:extLst>
+</a:theme>
+</file>
+
+<file path=ppt/theme/theme2.xml><?xml version="1.0" encoding="utf-8"?>
+<a:theme xmlns:a="http://schemas.openxmlformats.org/drawingml/2006/main" name="Office Theme">
+  <a:themeElements>
+    <a:clrScheme name="Office">
+      <a:dk1>
+        <a:sysClr val="windowText" lastClr="000000"/>
+      </a:dk1>
+      <a:lt1>
+        <a:sysClr val="window" lastClr="FFFFFF"/>
+      </a:lt1>
+      <a:dk2>
+        <a:srgbClr val="44546A"/>
+      </a:dk2>
+      <a:lt2>
+        <a:srgbClr val="E7E6E6"/>
+      </a:lt2>
+      <a:accent1>
+        <a:srgbClr val="4472C4"/>
+      </a:accent1>
+      <a:accent2>
+        <a:srgbClr val="ED7D31"/>
+      </a:accent2>
+      <a:accent3>
+        <a:srgbClr val="A5A5A5"/>
+      </a:accent3>
+      <a:accent4>
+        <a:srgbClr val="FFC000"/>
+      </a:accent4>
+      <a:accent5>
+        <a:srgbClr val="5B9BD5"/>
+      </a:accent5>
+      <a:accent6>
+        <a:srgbClr val="70AD47"/>
       </a:accent6>
       <a:hlink>
         <a:srgbClr val="0563C1"/>
